--- a/curso/pptx/S10.pptx
+++ b/curso/pptx/S10.pptx
@@ -3892,8 +3892,8 @@
         </p:nvSpPr>
         <p:spPr>
           <a:xfrm>
-            <a:off x="640000" y="420000"/>
-            <a:ext cx="10912000" cy="420000"/>
+            <a:off x="10652000" y="380000"/>
+            <a:ext cx="900000" cy="800000"/>
           </a:xfrm>
           <a:prstGeom prst="rect">
             <a:avLst/>
@@ -3908,17 +3908,17 @@
           <a:p>
             <a:pPr>
               <a:spcAft>
-                <a:spcPts val="810"/>
+                <a:spcPts val="1980"/>
               </a:spcAft>
             </a:pPr>
             <a:r>
-              <a:rPr sz="1800" b="1">
+              <a:rPr sz="4400" b="0">
                 <a:solidFill>
                   <a:srgbClr val="1F2A44"/>
                 </a:solidFill>
                 <a:latin typeface="Nunito Sans"/>
               </a:rPr>
-              <a:t>🦉 Aula de Filosofía</a:t>
+              <a:t>🙃</a:t>
             </a:r>
           </a:p>
         </p:txBody>

--- a/curso/pptx/S10.pptx
+++ b/curso/pptx/S10.pptx
@@ -473,426 +473,6 @@
     </a:lvl9pPr>
   </p:notesStyle>
 </p:notesMaster>
-</file>
-
-<file path=ppt/notesSlides/notesSlide1.xml><?xml version="1.0" encoding="utf-8"?>
-<p:notes xmlns:a="http://schemas.openxmlformats.org/drawingml/2006/main" xmlns:p="http://schemas.openxmlformats.org/presentationml/2006/main" xmlns:r="http://schemas.openxmlformats.org/officeDocument/2006/relationships">
-  <p:cSld>
-    <p:spTree>
-      <p:nvGrpSpPr>
-        <p:cNvPr id="1" name=""/>
-        <p:cNvGrpSpPr/>
-        <p:nvPr/>
-      </p:nvGrpSpPr>
-      <p:grpSpPr>
-        <a:xfrm>
-          <a:off x="0" y="0"/>
-          <a:ext cx="0" cy="0"/>
-          <a:chOff x="0" y="0"/>
-          <a:chExt cx="0" cy="0"/>
-        </a:xfrm>
-      </p:grpSpPr>
-      <p:sp>
-        <p:nvSpPr>
-          <p:cNvPr id="2" name="Slide Image Placeholder 1"/>
-          <p:cNvSpPr>
-            <a:spLocks noGrp="1"/>
-          </p:cNvSpPr>
-          <p:nvPr>
-            <p:ph type="sldImg" idx="2"/>
-          </p:nvPr>
-        </p:nvSpPr>
-        <p:spPr/>
-      </p:sp>
-      <p:sp>
-        <p:nvSpPr>
-          <p:cNvPr id="3" name="Notes Placeholder 2"/>
-          <p:cNvSpPr>
-            <a:spLocks noGrp="1"/>
-          </p:cNvSpPr>
-          <p:nvPr>
-            <p:ph type="body" idx="3" sz="quarter"/>
-          </p:nvPr>
-        </p:nvSpPr>
-        <p:spPr/>
-        <p:txBody>
-          <a:bodyPr/>
-          <a:lstStyle/>
-          <a:p>
-            <a:r>
-              <a:t>3 minutos. Sin apuntes. Es para recordar, no cuenta para nota.</a:t>
-            </a:r>
-          </a:p>
-        </p:txBody>
-      </p:sp>
-      <p:sp>
-        <p:nvSpPr>
-          <p:cNvPr id="4" name="Slide Number Placeholder 3"/>
-          <p:cNvSpPr>
-            <a:spLocks noGrp="1"/>
-          </p:cNvSpPr>
-          <p:nvPr>
-            <p:ph type="sldNum" idx="5" sz="quarter"/>
-          </p:nvPr>
-        </p:nvSpPr>
-        <p:spPr/>
-      </p:sp>
-    </p:spTree>
-  </p:cSld>
-  <p:clrMapOvr>
-    <a:masterClrMapping/>
-  </p:clrMapOvr>
-</p:notes>
-</file>
-
-<file path=ppt/notesSlides/notesSlide2.xml><?xml version="1.0" encoding="utf-8"?>
-<p:notes xmlns:a="http://schemas.openxmlformats.org/drawingml/2006/main" xmlns:p="http://schemas.openxmlformats.org/presentationml/2006/main" xmlns:r="http://schemas.openxmlformats.org/officeDocument/2006/relationships">
-  <p:cSld>
-    <p:spTree>
-      <p:nvGrpSpPr>
-        <p:cNvPr id="1" name=""/>
-        <p:cNvGrpSpPr/>
-        <p:nvPr/>
-      </p:nvGrpSpPr>
-      <p:grpSpPr>
-        <a:xfrm>
-          <a:off x="0" y="0"/>
-          <a:ext cx="0" cy="0"/>
-          <a:chOff x="0" y="0"/>
-          <a:chExt cx="0" cy="0"/>
-        </a:xfrm>
-      </p:grpSpPr>
-      <p:sp>
-        <p:nvSpPr>
-          <p:cNvPr id="2" name="Slide Image Placeholder 1"/>
-          <p:cNvSpPr>
-            <a:spLocks noGrp="1"/>
-          </p:cNvSpPr>
-          <p:nvPr>
-            <p:ph type="sldImg" idx="2"/>
-          </p:nvPr>
-        </p:nvSpPr>
-        <p:spPr/>
-      </p:sp>
-      <p:sp>
-        <p:nvSpPr>
-          <p:cNvPr id="3" name="Notes Placeholder 2"/>
-          <p:cNvSpPr>
-            <a:spLocks noGrp="1"/>
-          </p:cNvSpPr>
-          <p:nvPr>
-            <p:ph type="body" idx="3" sz="quarter"/>
-          </p:nvPr>
-        </p:nvSpPr>
-        <p:spPr/>
-        <p:txBody>
-          <a:bodyPr/>
-          <a:lstStyle/>
-          <a:p>
-            <a:r>
-              <a:t>3 minutos. Sin apuntes. Es para recordar, no cuenta para nota.</a:t>
-            </a:r>
-          </a:p>
-        </p:txBody>
-      </p:sp>
-      <p:sp>
-        <p:nvSpPr>
-          <p:cNvPr id="4" name="Slide Number Placeholder 3"/>
-          <p:cNvSpPr>
-            <a:spLocks noGrp="1"/>
-          </p:cNvSpPr>
-          <p:nvPr>
-            <p:ph type="sldNum" idx="5" sz="quarter"/>
-          </p:nvPr>
-        </p:nvSpPr>
-        <p:spPr/>
-      </p:sp>
-    </p:spTree>
-  </p:cSld>
-  <p:clrMapOvr>
-    <a:masterClrMapping/>
-  </p:clrMapOvr>
-</p:notes>
-</file>
-
-<file path=ppt/notesSlides/notesSlide3.xml><?xml version="1.0" encoding="utf-8"?>
-<p:notes xmlns:a="http://schemas.openxmlformats.org/drawingml/2006/main" xmlns:p="http://schemas.openxmlformats.org/presentationml/2006/main" xmlns:r="http://schemas.openxmlformats.org/officeDocument/2006/relationships">
-  <p:cSld>
-    <p:spTree>
-      <p:nvGrpSpPr>
-        <p:cNvPr id="1" name=""/>
-        <p:cNvGrpSpPr/>
-        <p:nvPr/>
-      </p:nvGrpSpPr>
-      <p:grpSpPr>
-        <a:xfrm>
-          <a:off x="0" y="0"/>
-          <a:ext cx="0" cy="0"/>
-          <a:chOff x="0" y="0"/>
-          <a:chExt cx="0" cy="0"/>
-        </a:xfrm>
-      </p:grpSpPr>
-      <p:sp>
-        <p:nvSpPr>
-          <p:cNvPr id="2" name="Slide Image Placeholder 1"/>
-          <p:cNvSpPr>
-            <a:spLocks noGrp="1"/>
-          </p:cNvSpPr>
-          <p:nvPr>
-            <p:ph type="sldImg" idx="2"/>
-          </p:nvPr>
-        </p:nvSpPr>
-        <p:spPr/>
-      </p:sp>
-      <p:sp>
-        <p:nvSpPr>
-          <p:cNvPr id="3" name="Notes Placeholder 2"/>
-          <p:cNvSpPr>
-            <a:spLocks noGrp="1"/>
-          </p:cNvSpPr>
-          <p:nvPr>
-            <p:ph type="body" idx="3" sz="quarter"/>
-          </p:nvPr>
-        </p:nvSpPr>
-        <p:spPr/>
-        <p:txBody>
-          <a:bodyPr/>
-          <a:lstStyle/>
-          <a:p>
-            <a:r>
-              <a:t>Nadie tiene que contestar: solo pensarlo.</a:t>
-            </a:r>
-          </a:p>
-        </p:txBody>
-      </p:sp>
-      <p:sp>
-        <p:nvSpPr>
-          <p:cNvPr id="4" name="Slide Number Placeholder 3"/>
-          <p:cNvSpPr>
-            <a:spLocks noGrp="1"/>
-          </p:cNvSpPr>
-          <p:nvPr>
-            <p:ph type="sldNum" idx="5" sz="quarter"/>
-          </p:nvPr>
-        </p:nvSpPr>
-        <p:spPr/>
-      </p:sp>
-    </p:spTree>
-  </p:cSld>
-  <p:clrMapOvr>
-    <a:masterClrMapping/>
-  </p:clrMapOvr>
-</p:notes>
-</file>
-
-<file path=ppt/notesSlides/notesSlide4.xml><?xml version="1.0" encoding="utf-8"?>
-<p:notes xmlns:a="http://schemas.openxmlformats.org/drawingml/2006/main" xmlns:p="http://schemas.openxmlformats.org/presentationml/2006/main" xmlns:r="http://schemas.openxmlformats.org/officeDocument/2006/relationships">
-  <p:cSld>
-    <p:spTree>
-      <p:nvGrpSpPr>
-        <p:cNvPr id="1" name=""/>
-        <p:cNvGrpSpPr/>
-        <p:nvPr/>
-      </p:nvGrpSpPr>
-      <p:grpSpPr>
-        <a:xfrm>
-          <a:off x="0" y="0"/>
-          <a:ext cx="0" cy="0"/>
-          <a:chOff x="0" y="0"/>
-          <a:chExt cx="0" cy="0"/>
-        </a:xfrm>
-      </p:grpSpPr>
-      <p:sp>
-        <p:nvSpPr>
-          <p:cNvPr id="2" name="Slide Image Placeholder 1"/>
-          <p:cNvSpPr>
-            <a:spLocks noGrp="1"/>
-          </p:cNvSpPr>
-          <p:nvPr>
-            <p:ph type="sldImg" idx="2"/>
-          </p:nvPr>
-        </p:nvSpPr>
-        <p:spPr/>
-      </p:sp>
-      <p:sp>
-        <p:nvSpPr>
-          <p:cNvPr id="3" name="Notes Placeholder 2"/>
-          <p:cNvSpPr>
-            <a:spLocks noGrp="1"/>
-          </p:cNvSpPr>
-          <p:nvPr>
-            <p:ph type="body" idx="3" sz="quarter"/>
-          </p:nvPr>
-        </p:nvSpPr>
-        <p:spPr/>
-        <p:txBody>
-          <a:bodyPr/>
-          <a:lstStyle/>
-          <a:p>
-            <a:r>
-              <a:t>Dejar unos segundos para que piensen la respuesta fácil antes de enseñar los pasos.</a:t>
-            </a:r>
-          </a:p>
-        </p:txBody>
-      </p:sp>
-      <p:sp>
-        <p:nvSpPr>
-          <p:cNvPr id="4" name="Slide Number Placeholder 3"/>
-          <p:cNvSpPr>
-            <a:spLocks noGrp="1"/>
-          </p:cNvSpPr>
-          <p:nvPr>
-            <p:ph type="sldNum" idx="5" sz="quarter"/>
-          </p:nvPr>
-        </p:nvSpPr>
-        <p:spPr/>
-      </p:sp>
-    </p:spTree>
-  </p:cSld>
-  <p:clrMapOvr>
-    <a:masterClrMapping/>
-  </p:clrMapOvr>
-</p:notes>
-</file>
-
-<file path=ppt/notesSlides/notesSlide5.xml><?xml version="1.0" encoding="utf-8"?>
-<p:notes xmlns:a="http://schemas.openxmlformats.org/drawingml/2006/main" xmlns:p="http://schemas.openxmlformats.org/presentationml/2006/main" xmlns:r="http://schemas.openxmlformats.org/officeDocument/2006/relationships">
-  <p:cSld>
-    <p:spTree>
-      <p:nvGrpSpPr>
-        <p:cNvPr id="1" name=""/>
-        <p:cNvGrpSpPr/>
-        <p:nvPr/>
-      </p:nvGrpSpPr>
-      <p:grpSpPr>
-        <a:xfrm>
-          <a:off x="0" y="0"/>
-          <a:ext cx="0" cy="0"/>
-          <a:chOff x="0" y="0"/>
-          <a:chExt cx="0" cy="0"/>
-        </a:xfrm>
-      </p:grpSpPr>
-      <p:sp>
-        <p:nvSpPr>
-          <p:cNvPr id="2" name="Slide Image Placeholder 1"/>
-          <p:cNvSpPr>
-            <a:spLocks noGrp="1"/>
-          </p:cNvSpPr>
-          <p:nvPr>
-            <p:ph type="sldImg" idx="2"/>
-          </p:nvPr>
-        </p:nvSpPr>
-        <p:spPr/>
-      </p:sp>
-      <p:sp>
-        <p:nvSpPr>
-          <p:cNvPr id="3" name="Notes Placeholder 2"/>
-          <p:cNvSpPr>
-            <a:spLocks noGrp="1"/>
-          </p:cNvSpPr>
-          <p:nvPr>
-            <p:ph type="body" idx="3" sz="quarter"/>
-          </p:nvPr>
-        </p:nvSpPr>
-        <p:spPr/>
-        <p:txBody>
-          <a:bodyPr/>
-          <a:lstStyle/>
-          <a:p>
-            <a:r>
-              <a:t>Dejar 2 minutos para que lo escriban. La diapositiva siguiente muestra el resumen.</a:t>
-            </a:r>
-          </a:p>
-        </p:txBody>
-      </p:sp>
-      <p:sp>
-        <p:nvSpPr>
-          <p:cNvPr id="4" name="Slide Number Placeholder 3"/>
-          <p:cNvSpPr>
-            <a:spLocks noGrp="1"/>
-          </p:cNvSpPr>
-          <p:nvPr>
-            <p:ph type="sldNum" idx="5" sz="quarter"/>
-          </p:nvPr>
-        </p:nvSpPr>
-        <p:spPr/>
-      </p:sp>
-    </p:spTree>
-  </p:cSld>
-  <p:clrMapOvr>
-    <a:masterClrMapping/>
-  </p:clrMapOvr>
-</p:notes>
-</file>
-
-<file path=ppt/notesSlides/notesSlide6.xml><?xml version="1.0" encoding="utf-8"?>
-<p:notes xmlns:a="http://schemas.openxmlformats.org/drawingml/2006/main" xmlns:p="http://schemas.openxmlformats.org/presentationml/2006/main" xmlns:r="http://schemas.openxmlformats.org/officeDocument/2006/relationships">
-  <p:cSld>
-    <p:spTree>
-      <p:nvGrpSpPr>
-        <p:cNvPr id="1" name=""/>
-        <p:cNvGrpSpPr/>
-        <p:nvPr/>
-      </p:nvGrpSpPr>
-      <p:grpSpPr>
-        <a:xfrm>
-          <a:off x="0" y="0"/>
-          <a:ext cx="0" cy="0"/>
-          <a:chOff x="0" y="0"/>
-          <a:chExt cx="0" cy="0"/>
-        </a:xfrm>
-      </p:grpSpPr>
-      <p:sp>
-        <p:nvSpPr>
-          <p:cNvPr id="2" name="Slide Image Placeholder 1"/>
-          <p:cNvSpPr>
-            <a:spLocks noGrp="1"/>
-          </p:cNvSpPr>
-          <p:nvPr>
-            <p:ph type="sldImg" idx="2"/>
-          </p:nvPr>
-        </p:nvSpPr>
-        <p:spPr/>
-      </p:sp>
-      <p:sp>
-        <p:nvSpPr>
-          <p:cNvPr id="3" name="Notes Placeholder 2"/>
-          <p:cNvSpPr>
-            <a:spLocks noGrp="1"/>
-          </p:cNvSpPr>
-          <p:nvPr>
-            <p:ph type="body" idx="3" sz="quarter"/>
-          </p:nvPr>
-        </p:nvSpPr>
-        <p:spPr/>
-        <p:txBody>
-          <a:bodyPr/>
-          <a:lstStyle/>
-          <a:p>
-            <a:r>
-              <a:t>Buscar: «razonamiento deductivo e inductivo ejemplos» · «deducción e inducción explicación sencilla»</a:t>
-            </a:r>
-          </a:p>
-        </p:txBody>
-      </p:sp>
-      <p:sp>
-        <p:nvSpPr>
-          <p:cNvPr id="4" name="Slide Number Placeholder 3"/>
-          <p:cNvSpPr>
-            <a:spLocks noGrp="1"/>
-          </p:cNvSpPr>
-          <p:nvPr>
-            <p:ph type="sldNum" idx="5" sz="quarter"/>
-          </p:nvPr>
-        </p:nvSpPr>
-        <p:spPr/>
-      </p:sp>
-    </p:spTree>
-  </p:cSld>
-  <p:clrMapOvr>
-    <a:masterClrMapping/>
-  </p:clrMapOvr>
-</p:notes>
 </file>
 
 <file path=ppt/slideLayouts/slideLayout1.xml><?xml version="1.0" encoding="utf-8"?>

--- a/curso/pptx/S10.pptx
+++ b/curso/pptx/S10.pptx
@@ -3801,7 +3801,7 @@
                 </a:solidFill>
                 <a:latin typeface="Nunito Sans"/>
               </a:rPr>
-              <a:t>«Todos los jugadores del equipo tienen que pasar el reconocimiento médico. Naiara es del equipo. Por tanto, Naiara tiene que pasarlo.»</a:t>
+              <a:t>«Todos los jugadores del equipo tienen que pasar el reconocimiento médico. Una chica es del equipo. Por tanto, esa chica tiene que pasarlo.»</a:t>
             </a:r>
           </a:p>
         </p:txBody>
@@ -4151,7 +4151,7 @@
                 </a:solidFill>
                 <a:latin typeface="Nunito Sans"/>
               </a:rPr>
-              <a:t>¿De dónde sale la conclusión? De casos que Kevin ha vivido.</a:t>
+              <a:t>¿De dónde sale la conclusión? De casos que ese chico ha vivido.</a:t>
             </a:r>
           </a:p>
           <a:p>
@@ -4757,7 +4757,7 @@
                 </a:solidFill>
                 <a:latin typeface="Nunito Sans"/>
               </a:rPr>
-              <a:t>«Todos los de 2.º B tienen Inglés. Aitor tiene Inglés. Por tanto, Aitor es de 2.º B.»</a:t>
+              <a:t>«Todos los de 2.º B tienen Inglés. Un chico tiene Inglés. Por tanto, ese chico es de 2.º B.»</a:t>
             </a:r>
           </a:p>
         </p:txBody>
@@ -4855,7 +4855,7 @@
                 </a:solidFill>
                 <a:latin typeface="Nunito Sans"/>
               </a:rPr>
-              <a:t>Las dos premisas pueden ser verdad y Aitor ser de 2.º A, que también tiene Inglés.</a:t>
+              <a:t>Las dos premisas pueden ser verdad y ese chico ser de 2.º A, que también tiene Inglés.</a:t>
             </a:r>
           </a:p>
           <a:p>
@@ -7051,7 +7051,7 @@
                 </a:solidFill>
                 <a:latin typeface="Nunito Sans"/>
               </a:rPr>
-              <a:t>Kevin: «Todas las veces que he pedido pizza en ese sitio ha llegado fría. Hoy también llegará fría».</a:t>
+              <a:t>Un chico: «Todas las veces que he pedido pizza en ese sitio ha llegado fría. Hoy también llegará fría».</a:t>
             </a:r>
           </a:p>
         </p:txBody>
@@ -7471,7 +7471,7 @@
                 </a:solidFill>
                 <a:latin typeface="Nunito Sans"/>
               </a:rPr>
-              <a:t>P2: Aitor es de 2.º</a:t>
+              <a:t>P2: un chico es de 2.º</a:t>
             </a:r>
           </a:p>
           <a:p>
@@ -7496,7 +7496,7 @@
                 </a:solidFill>
                 <a:latin typeface="Nunito Sans"/>
               </a:rPr>
-              <a:t>C: Por tanto, Aitor tiene Inglés</a:t>
+              <a:t>C: Por tanto, ese chico tiene Inglés</a:t>
             </a:r>
           </a:p>
         </p:txBody>

--- a/curso/pptx/S10.pptx
+++ b/curso/pptx/S10.pptx
@@ -3537,7 +3537,7 @@
                 </a:solidFill>
                 <a:latin typeface="Nunito Sans"/>
               </a:rPr>
-              <a:t>PENSAMIENTO CRÍTICO · SESIÓN 10 · UNIDAD 2 · ARGUMENTAR</a:t>
+              <a:t>PENSAMIENTO CRÍTICO · SESIÓN 10 · UNIDAD 2 · AUTORIDAD E INFLUENCIA</a:t>
             </a:r>
           </a:p>
         </p:txBody>
@@ -3576,7 +3576,7 @@
                 </a:solidFill>
                 <a:latin typeface="Fredoka"/>
               </a:rPr>
-              <a:t>Deducción e inducción</a:t>
+              <a:t>Obedecer y seguir al grupo</a:t>
             </a:r>
           </a:p>
         </p:txBody>
@@ -3615,7 +3615,7 @@
                 </a:solidFill>
                 <a:latin typeface="Nunito Sans"/>
               </a:rPr>
-              <a:t>En una deducción bien hecha, la conclusión es segura si las premisas son verdad; en una inducción, solo es probable.</a:t>
+              <a:t>Los experimentos de Asch y Milgram muestran que el grupo y la autoridad pueden hacernos actuar contra lo que pensamos.</a:t>
             </a:r>
           </a:p>
         </p:txBody>
@@ -3680,7 +3680,7 @@
                 </a:solidFill>
                 <a:latin typeface="Nunito Sans"/>
               </a:rPr>
-              <a:t>BLOQUE 2 · CASOS RESUELTOS</a:t>
+              <a:t>BLOQUE 2 · MILGRAM: OBEDECER A UNA AUTORIDAD (1961-1962)</a:t>
             </a:r>
           </a:p>
         </p:txBody>
@@ -3719,7 +3719,7 @@
                 </a:solidFill>
                 <a:latin typeface="Fredoka"/>
               </a:rPr>
-              <a:t>Caso 1 · El reconocimiento médico</a:t>
+              <a:t>Así era el experimento de Milgram</a:t>
             </a:r>
           </a:p>
         </p:txBody>
@@ -3801,7 +3801,7 @@
                 </a:solidFill>
                 <a:latin typeface="Nunito Sans"/>
               </a:rPr>
-              <a:t>«Todos los jugadores del equipo tienen que pasar el reconocimiento médico. Una chica es del equipo. Por tanto, esa chica tiene que pasarlo.»</a:t>
+              <a:t>Stanley Milgram, psicólogo de la Universidad de Yale (Estados Unidos), dijo a unos voluntarios que estudiaba cómo afecta el castigo a la memoria.</a:t>
             </a:r>
           </a:p>
         </p:txBody>
@@ -3849,7 +3849,43 @@
                 </a:solidFill>
                 <a:latin typeface="Nunito Sans"/>
               </a:rPr>
-              <a:t>¿La conclusión sale de lo que dicen las premisas? Sí.</a:t>
+              <a:t>El voluntario era el «</a:t>
+            </a:r>
+            <a:r>
+              <a:rPr sz="2400" b="1">
+                <a:solidFill>
+                  <a:srgbClr val="1F2A44"/>
+                </a:solidFill>
+                <a:latin typeface="Nunito Sans"/>
+              </a:rPr>
+              <a:t>maestro</a:t>
+            </a:r>
+            <a:r>
+              <a:rPr sz="2400" b="0">
+                <a:solidFill>
+                  <a:srgbClr val="1F2A44"/>
+                </a:solidFill>
+                <a:latin typeface="Nunito Sans"/>
+              </a:rPr>
+              <a:t>». El «</a:t>
+            </a:r>
+            <a:r>
+              <a:rPr sz="2400" b="1">
+                <a:solidFill>
+                  <a:srgbClr val="1F2A44"/>
+                </a:solidFill>
+                <a:latin typeface="Nunito Sans"/>
+              </a:rPr>
+              <a:t>alumno</a:t>
+            </a:r>
+            <a:r>
+              <a:rPr sz="2400" b="0">
+                <a:solidFill>
+                  <a:srgbClr val="1F2A44"/>
+                </a:solidFill>
+                <a:latin typeface="Nunito Sans"/>
+              </a:rPr>
+              <a:t>», atado a una silla en otra sala, era un actor.</a:t>
             </a:r>
           </a:p>
           <a:p>
@@ -3874,7 +3910,25 @@
                 </a:solidFill>
                 <a:latin typeface="Nunito Sans"/>
               </a:rPr>
-              <a:t>Si las dos premisas son verdad, ¿puede ser falsa la conclusión? No.</a:t>
+              <a:t>Por cada error, el maestro daba una descarga eléctrica cada vez más fuerte. Las descargas eran </a:t>
+            </a:r>
+            <a:r>
+              <a:rPr sz="2400" b="1">
+                <a:solidFill>
+                  <a:srgbClr val="1F2A44"/>
+                </a:solidFill>
+                <a:latin typeface="Nunito Sans"/>
+              </a:rPr>
+              <a:t>falsas</a:t>
+            </a:r>
+            <a:r>
+              <a:rPr sz="2400" b="0">
+                <a:solidFill>
+                  <a:srgbClr val="1F2A44"/>
+                </a:solidFill>
+                <a:latin typeface="Nunito Sans"/>
+              </a:rPr>
+              <a:t>, pero él no lo sabía.</a:t>
             </a:r>
           </a:p>
           <a:p>
@@ -3899,16 +3953,41 @@
                 </a:solidFill>
                 <a:latin typeface="Nunito Sans"/>
               </a:rPr>
-              <a:t>Conclusión: es una </a:t>
-            </a:r>
+              <a:t>El actor protestaba, golpeaba la pared y al final dejaba de contestar. Si el maestro dudaba, el científico decía: «Continúe, por favor».</a:t>
+            </a:r>
+          </a:p>
+          <a:p>
+            <a:pPr>
+              <a:spcAft>
+                <a:spcPts val="1080"/>
+              </a:spcAft>
+            </a:pPr>
             <a:r>
               <a:rPr sz="2400" b="1">
                 <a:solidFill>
+                  <a:srgbClr val="E8793A"/>
+                </a:solidFill>
+                <a:latin typeface="Nunito Sans"/>
+              </a:rPr>
+              <a:t>4. </a:t>
+            </a:r>
+            <a:r>
+              <a:rPr sz="2400" b="0">
+                <a:solidFill>
                   <a:srgbClr val="1F2A44"/>
                 </a:solidFill>
                 <a:latin typeface="Nunito Sans"/>
               </a:rPr>
-              <a:t>deducción</a:t>
+              <a:t>Conclusión: en la versión más conocida, el </a:t>
+            </a:r>
+            <a:r>
+              <a:rPr sz="2400" b="1">
+                <a:solidFill>
+                  <a:srgbClr val="1F2A44"/>
+                </a:solidFill>
+                <a:latin typeface="Nunito Sans"/>
+              </a:rPr>
+              <a:t>65 %</a:t>
             </a:r>
             <a:r>
               <a:rPr sz="2400" b="0">
@@ -3917,7 +3996,7 @@
                 </a:solidFill>
                 <a:latin typeface="Nunito Sans"/>
               </a:rPr>
-              <a:t>. La conclusión es segura.</a:t>
+              <a:t> llegó hasta la descarga más fuerte, de 450 voltios.</a:t>
             </a:r>
           </a:p>
         </p:txBody>
@@ -3982,7 +4061,7 @@
                 </a:solidFill>
                 <a:latin typeface="Nunito Sans"/>
               </a:rPr>
-              <a:t>BLOQUE 2 · CASOS RESUELTOS</a:t>
+              <a:t>BLOQUE 2 · MILGRAM: OBEDECER A UNA AUTORIDAD (1961-1962)</a:t>
             </a:r>
           </a:p>
         </p:txBody>
@@ -4021,64 +4100,21 @@
                 </a:solidFill>
                 <a:latin typeface="Fredoka"/>
               </a:rPr>
-              <a:t>Caso 2 · La pizza fría</a:t>
-            </a:r>
-          </a:p>
-        </p:txBody>
-      </p:sp>
-      <p:sp>
-        <p:nvSpPr>
-          <p:cNvPr id="4" name="Rectangle 3"/>
-          <p:cNvSpPr/>
-          <p:nvPr/>
-        </p:nvSpPr>
-        <p:spPr>
-          <a:xfrm>
-            <a:off x="640000" y="1600000"/>
-            <a:ext cx="10912000" cy="1100000"/>
-          </a:xfrm>
-          <a:prstGeom prst="rect">
-            <a:avLst/>
-          </a:prstGeom>
-          <a:solidFill>
-            <a:srgbClr val="FFFFFF"/>
-          </a:solidFill>
-          <a:ln>
-            <a:noFill/>
-          </a:ln>
-        </p:spPr>
-        <p:style>
-          <a:lnRef idx="1">
-            <a:schemeClr val="accent1"/>
-          </a:lnRef>
-          <a:fillRef idx="3">
-            <a:schemeClr val="accent1"/>
-          </a:fillRef>
-          <a:effectRef idx="2">
-            <a:schemeClr val="accent1"/>
-          </a:effectRef>
-          <a:fontRef idx="minor">
-            <a:schemeClr val="lt1"/>
-          </a:fontRef>
-        </p:style>
-        <p:txBody>
-          <a:bodyPr rtlCol="0" anchor="ctr"/>
-          <a:lstStyle/>
-          <a:p>
-            <a:pPr algn="ctr"/>
-          </a:p>
-        </p:txBody>
-      </p:sp>
-      <p:sp>
-        <p:nvSpPr>
-          <p:cNvPr id="5" name="TextBox 4"/>
+              <a:t>Las críticas al experimento de Milgram</a:t>
+            </a:r>
+          </a:p>
+        </p:txBody>
+      </p:sp>
+      <p:sp>
+        <p:nvSpPr>
+          <p:cNvPr id="4" name="TextBox 3"/>
           <p:cNvSpPr txBox="1"/>
           <p:nvPr/>
         </p:nvSpPr>
         <p:spPr>
           <a:xfrm>
-            <a:off x="840000" y="1650000"/>
-            <a:ext cx="10512000" cy="1000000"/>
+            <a:off x="640000" y="1650000"/>
+            <a:ext cx="10912000" cy="4808000"/>
           </a:xfrm>
           <a:prstGeom prst="rect">
             <a:avLst/>
@@ -4086,45 +4122,6 @@
           <a:noFill/>
         </p:spPr>
         <p:txBody>
-          <a:bodyPr wrap="square" anchor="ctr">
-            <a:spAutoFit/>
-          </a:bodyPr>
-          <a:lstStyle/>
-          <a:p>
-            <a:pPr>
-              <a:spcAft>
-                <a:spcPts val="1170"/>
-              </a:spcAft>
-            </a:pPr>
-            <a:r>
-              <a:rPr sz="2600" b="1">
-                <a:solidFill>
-                  <a:srgbClr val="1F2A44"/>
-                </a:solidFill>
-                <a:latin typeface="Nunito Sans"/>
-              </a:rPr>
-              <a:t>«Todas las veces que he pedido pizza en ese sitio ha llegado fría. Hoy también llegará fría.»</a:t>
-            </a:r>
-          </a:p>
-        </p:txBody>
-      </p:sp>
-      <p:sp>
-        <p:nvSpPr>
-          <p:cNvPr id="6" name="TextBox 5"/>
-          <p:cNvSpPr txBox="1"/>
-          <p:nvPr/>
-        </p:nvSpPr>
-        <p:spPr>
-          <a:xfrm>
-            <a:off x="640000" y="2900000"/>
-            <a:ext cx="10912000" cy="3500000"/>
-          </a:xfrm>
-          <a:prstGeom prst="rect">
-            <a:avLst/>
-          </a:prstGeom>
-          <a:noFill/>
-        </p:spPr>
-        <p:txBody>
           <a:bodyPr wrap="square">
             <a:spAutoFit/>
           </a:bodyPr>
@@ -4132,119 +4129,164 @@
           <a:p>
             <a:pPr>
               <a:spcAft>
-                <a:spcPts val="1080"/>
-              </a:spcAft>
-            </a:pPr>
-            <a:r>
-              <a:rPr sz="2400" b="1">
+                <a:spcPts val="1260"/>
+              </a:spcAft>
+            </a:pPr>
+            <a:r>
+              <a:rPr sz="2800" b="1">
                 <a:solidFill>
                   <a:srgbClr val="E8793A"/>
                 </a:solidFill>
                 <a:latin typeface="Nunito Sans"/>
               </a:rPr>
-              <a:t>1. </a:t>
-            </a:r>
-            <a:r>
-              <a:rPr sz="2400" b="0">
+              <a:t>• </a:t>
+            </a:r>
+            <a:r>
+              <a:rPr sz="2800" b="0">
                 <a:solidFill>
                   <a:srgbClr val="1F2A44"/>
                 </a:solidFill>
                 <a:latin typeface="Nunito Sans"/>
               </a:rPr>
-              <a:t>¿De dónde sale la conclusión? De casos que ese chico ha vivido.</a:t>
-            </a:r>
-          </a:p>
-          <a:p>
-            <a:pPr>
-              <a:spcAft>
-                <a:spcPts val="1080"/>
-              </a:spcAft>
-            </a:pPr>
-            <a:r>
-              <a:rPr sz="2400" b="1">
+              <a:t>Los voluntarios </a:t>
+            </a:r>
+            <a:r>
+              <a:rPr sz="2800" b="1">
+                <a:solidFill>
+                  <a:srgbClr val="1F2A44"/>
+                </a:solidFill>
+                <a:latin typeface="Nunito Sans"/>
+              </a:rPr>
+              <a:t>sufrieron</a:t>
+            </a:r>
+            <a:r>
+              <a:rPr sz="2800" b="0">
+                <a:solidFill>
+                  <a:srgbClr val="1F2A44"/>
+                </a:solidFill>
+                <a:latin typeface="Nunito Sans"/>
+              </a:rPr>
+              <a:t>: sudaban, temblaban, algunos tenían ataques de risa nerviosa</a:t>
+            </a:r>
+          </a:p>
+          <a:p>
+            <a:pPr>
+              <a:spcAft>
+                <a:spcPts val="1260"/>
+              </a:spcAft>
+            </a:pPr>
+            <a:r>
+              <a:rPr sz="2800" b="1">
                 <a:solidFill>
                   <a:srgbClr val="E8793A"/>
                 </a:solidFill>
                 <a:latin typeface="Nunito Sans"/>
               </a:rPr>
-              <a:t>2. </a:t>
-            </a:r>
-            <a:r>
-              <a:rPr sz="2400" b="0">
+              <a:t>• </a:t>
+            </a:r>
+            <a:r>
+              <a:rPr sz="2800" b="0">
                 <a:solidFill>
                   <a:srgbClr val="1F2A44"/>
                 </a:solidFill>
                 <a:latin typeface="Nunito Sans"/>
               </a:rPr>
-              <a:t>¿Puede fallar? Sí: hoy puede venir otro repartidor o haber menos tráfico.</a:t>
-            </a:r>
-          </a:p>
-          <a:p>
-            <a:pPr>
-              <a:spcAft>
-                <a:spcPts val="1080"/>
-              </a:spcAft>
-            </a:pPr>
-            <a:r>
-              <a:rPr sz="2400" b="1">
+              <a:t>Los </a:t>
+            </a:r>
+            <a:r>
+              <a:rPr sz="2800" b="1">
+                <a:solidFill>
+                  <a:srgbClr val="1F2A44"/>
+                </a:solidFill>
+                <a:latin typeface="Nunito Sans"/>
+              </a:rPr>
+              <a:t>engañaron</a:t>
+            </a:r>
+            <a:r>
+              <a:rPr sz="2800" b="0">
+                <a:solidFill>
+                  <a:srgbClr val="1F2A44"/>
+                </a:solidFill>
+                <a:latin typeface="Nunito Sans"/>
+              </a:rPr>
+              <a:t>: no sabían de qué iba de verdad</a:t>
+            </a:r>
+          </a:p>
+          <a:p>
+            <a:pPr>
+              <a:spcAft>
+                <a:spcPts val="1260"/>
+              </a:spcAft>
+            </a:pPr>
+            <a:r>
+              <a:rPr sz="2800" b="1">
                 <a:solidFill>
                   <a:srgbClr val="E8793A"/>
                 </a:solidFill>
                 <a:latin typeface="Nunito Sans"/>
               </a:rPr>
-              <a:t>3. </a:t>
-            </a:r>
-            <a:r>
-              <a:rPr sz="2400" b="0">
+              <a:t>• </a:t>
+            </a:r>
+            <a:r>
+              <a:rPr sz="2800" b="0">
                 <a:solidFill>
                   <a:srgbClr val="1F2A44"/>
                 </a:solidFill>
                 <a:latin typeface="Nunito Sans"/>
               </a:rPr>
-              <a:t>¿Es fuerte? Depende de cuántas veces ha pedido: dos veces no es lo mismo que veinte.</a:t>
-            </a:r>
-          </a:p>
-          <a:p>
-            <a:pPr>
-              <a:spcAft>
-                <a:spcPts val="1080"/>
-              </a:spcAft>
-            </a:pPr>
-            <a:r>
-              <a:rPr sz="2400" b="1">
+              <a:t>Era muy difícil </a:t>
+            </a:r>
+            <a:r>
+              <a:rPr sz="2800" b="1">
+                <a:solidFill>
+                  <a:srgbClr val="1F2A44"/>
+                </a:solidFill>
+                <a:latin typeface="Nunito Sans"/>
+              </a:rPr>
+              <a:t>dejarlo</a:t>
+            </a:r>
+            <a:r>
+              <a:rPr sz="2800" b="0">
+                <a:solidFill>
+                  <a:srgbClr val="1F2A44"/>
+                </a:solidFill>
+                <a:latin typeface="Nunito Sans"/>
+              </a:rPr>
+              <a:t>: el científico insistía</a:t>
+            </a:r>
+          </a:p>
+          <a:p>
+            <a:pPr>
+              <a:spcAft>
+                <a:spcPts val="1260"/>
+              </a:spcAft>
+            </a:pPr>
+            <a:r>
+              <a:rPr sz="2800" b="1">
                 <a:solidFill>
                   <a:srgbClr val="E8793A"/>
                 </a:solidFill>
                 <a:latin typeface="Nunito Sans"/>
               </a:rPr>
-              <a:t>4. </a:t>
-            </a:r>
-            <a:r>
-              <a:rPr sz="2400" b="0">
+              <a:t>• </a:t>
+            </a:r>
+            <a:r>
+              <a:rPr sz="2800" b="0">
                 <a:solidFill>
                   <a:srgbClr val="1F2A44"/>
                 </a:solidFill>
                 <a:latin typeface="Nunito Sans"/>
               </a:rPr>
-              <a:t>Conclusión: es una </a:t>
-            </a:r>
-            <a:r>
-              <a:rPr sz="2400" b="1">
+              <a:t>Hoy un experimento así, entero, </a:t>
+            </a:r>
+            <a:r>
+              <a:rPr sz="2800" b="1">
                 <a:solidFill>
                   <a:srgbClr val="1F2A44"/>
                 </a:solidFill>
                 <a:latin typeface="Nunito Sans"/>
               </a:rPr>
-              <a:t>inducción</a:t>
-            </a:r>
-            <a:r>
-              <a:rPr sz="2400" b="0">
-                <a:solidFill>
-                  <a:srgbClr val="1F2A44"/>
-                </a:solidFill>
-                <a:latin typeface="Nunito Sans"/>
-              </a:rPr>
-              <a:t>. La conclusión es probable, no segura.</a:t>
+              <a:t>no estaría permitido</a:t>
             </a:r>
           </a:p>
         </p:txBody>
@@ -4309,7 +4351,7 @@
                 </a:solidFill>
                 <a:latin typeface="Nunito Sans"/>
               </a:rPr>
-              <a:t>BLOQUE 2 · CASOS RESUELTOS</a:t>
+              <a:t>BLOQUE 2 · MILGRAM: OBEDECER A UNA AUTORIDAD (1961-1962)</a:t>
             </a:r>
           </a:p>
         </p:txBody>
@@ -4348,64 +4390,21 @@
                 </a:solidFill>
                 <a:latin typeface="Fredoka"/>
               </a:rPr>
-              <a:t>Caso 3 · Los cisnes</a:t>
-            </a:r>
-          </a:p>
-        </p:txBody>
-      </p:sp>
-      <p:sp>
-        <p:nvSpPr>
-          <p:cNvPr id="4" name="Rectangle 3"/>
-          <p:cNvSpPr/>
-          <p:nvPr/>
-        </p:nvSpPr>
-        <p:spPr>
-          <a:xfrm>
-            <a:off x="640000" y="1600000"/>
-            <a:ext cx="10912000" cy="1100000"/>
-          </a:xfrm>
-          <a:prstGeom prst="rect">
-            <a:avLst/>
-          </a:prstGeom>
-          <a:solidFill>
-            <a:srgbClr val="FFFFFF"/>
-          </a:solidFill>
-          <a:ln>
-            <a:noFill/>
-          </a:ln>
-        </p:spPr>
-        <p:style>
-          <a:lnRef idx="1">
-            <a:schemeClr val="accent1"/>
-          </a:lnRef>
-          <a:fillRef idx="3">
-            <a:schemeClr val="accent1"/>
-          </a:fillRef>
-          <a:effectRef idx="2">
-            <a:schemeClr val="accent1"/>
-          </a:effectRef>
-          <a:fontRef idx="minor">
-            <a:schemeClr val="lt1"/>
-          </a:fontRef>
-        </p:style>
-        <p:txBody>
-          <a:bodyPr rtlCol="0" anchor="ctr"/>
-          <a:lstStyle/>
-          <a:p>
-            <a:pPr algn="ctr"/>
-          </a:p>
-        </p:txBody>
-      </p:sp>
-      <p:sp>
-        <p:nvSpPr>
-          <p:cNvPr id="5" name="TextBox 4"/>
+              <a:t>Lo que todavía se discute</a:t>
+            </a:r>
+          </a:p>
+        </p:txBody>
+      </p:sp>
+      <p:sp>
+        <p:nvSpPr>
+          <p:cNvPr id="4" name="TextBox 3"/>
           <p:cNvSpPr txBox="1"/>
           <p:nvPr/>
         </p:nvSpPr>
         <p:spPr>
           <a:xfrm>
-            <a:off x="840000" y="1650000"/>
-            <a:ext cx="10512000" cy="1000000"/>
+            <a:off x="640000" y="1650000"/>
+            <a:ext cx="10912000" cy="4808000"/>
           </a:xfrm>
           <a:prstGeom prst="rect">
             <a:avLst/>
@@ -4413,45 +4412,6 @@
           <a:noFill/>
         </p:spPr>
         <p:txBody>
-          <a:bodyPr wrap="square" anchor="ctr">
-            <a:spAutoFit/>
-          </a:bodyPr>
-          <a:lstStyle/>
-          <a:p>
-            <a:pPr>
-              <a:spcAft>
-                <a:spcPts val="1170"/>
-              </a:spcAft>
-            </a:pPr>
-            <a:r>
-              <a:rPr sz="2600" b="1">
-                <a:solidFill>
-                  <a:srgbClr val="1F2A44"/>
-                </a:solidFill>
-                <a:latin typeface="Nunito Sans"/>
-              </a:rPr>
-              <a:t>Durante siglos, en Europa solo se vieron cisnes blancos. Por eso se decía: «Todos los cisnes son blancos». En 1697, unos exploradores encontraron cisnes negros en Australia.</a:t>
-            </a:r>
-          </a:p>
-        </p:txBody>
-      </p:sp>
-      <p:sp>
-        <p:nvSpPr>
-          <p:cNvPr id="6" name="TextBox 5"/>
-          <p:cNvSpPr txBox="1"/>
-          <p:nvPr/>
-        </p:nvSpPr>
-        <p:spPr>
-          <a:xfrm>
-            <a:off x="640000" y="2900000"/>
-            <a:ext cx="10912000" cy="3500000"/>
-          </a:xfrm>
-          <a:prstGeom prst="rect">
-            <a:avLst/>
-          </a:prstGeom>
-          <a:noFill/>
-        </p:spPr>
-        <p:txBody>
           <a:bodyPr wrap="square">
             <a:spAutoFit/>
           </a:bodyPr>
@@ -4459,119 +4419,101 @@
           <a:p>
             <a:pPr>
               <a:spcAft>
-                <a:spcPts val="1080"/>
-              </a:spcAft>
-            </a:pPr>
-            <a:r>
-              <a:rPr sz="2400" b="1">
+                <a:spcPts val="1260"/>
+              </a:spcAft>
+            </a:pPr>
+            <a:r>
+              <a:rPr sz="2800" b="1">
                 <a:solidFill>
                   <a:srgbClr val="E8793A"/>
                 </a:solidFill>
                 <a:latin typeface="Nunito Sans"/>
               </a:rPr>
-              <a:t>1. </a:t>
-            </a:r>
-            <a:r>
-              <a:rPr sz="2400" b="0">
+              <a:t>• </a:t>
+            </a:r>
+            <a:r>
+              <a:rPr sz="2800" b="0">
                 <a:solidFill>
                   <a:srgbClr val="1F2A44"/>
                 </a:solidFill>
                 <a:latin typeface="Nunito Sans"/>
               </a:rPr>
-              <a:t>Era una </a:t>
-            </a:r>
-            <a:r>
-              <a:rPr sz="2400" b="1">
+              <a:t>Milgram hizo muchas versiones: en unas obedeció casi nadie, en otras casi todos</a:t>
+            </a:r>
+          </a:p>
+          <a:p>
+            <a:pPr>
+              <a:spcAft>
+                <a:spcPts val="1260"/>
+              </a:spcAft>
+            </a:pPr>
+            <a:r>
+              <a:rPr sz="2800" b="1">
+                <a:solidFill>
+                  <a:srgbClr val="E8793A"/>
+                </a:solidFill>
+                <a:latin typeface="Nunito Sans"/>
+              </a:rPr>
+              <a:t>• </a:t>
+            </a:r>
+            <a:r>
+              <a:rPr sz="2800" b="0">
                 <a:solidFill>
                   <a:srgbClr val="1F2A44"/>
                 </a:solidFill>
                 <a:latin typeface="Nunito Sans"/>
               </a:rPr>
-              <a:t>inducción</a:t>
-            </a:r>
-            <a:r>
-              <a:rPr sz="2400" b="0">
+              <a:t>Algunos voluntarios dudaban de que las descargas fueran reales</a:t>
+            </a:r>
+          </a:p>
+          <a:p>
+            <a:pPr>
+              <a:spcAft>
+                <a:spcPts val="1260"/>
+              </a:spcAft>
+            </a:pPr>
+            <a:r>
+              <a:rPr sz="2800" b="1">
+                <a:solidFill>
+                  <a:srgbClr val="E8793A"/>
+                </a:solidFill>
+                <a:latin typeface="Nunito Sans"/>
+              </a:rPr>
+              <a:t>• </a:t>
+            </a:r>
+            <a:r>
+              <a:rPr sz="2800" b="0">
                 <a:solidFill>
                   <a:srgbClr val="1F2A44"/>
                 </a:solidFill>
                 <a:latin typeface="Nunito Sans"/>
               </a:rPr>
-              <a:t>: muchos casos vistos y una conclusión general.</a:t>
-            </a:r>
-          </a:p>
-          <a:p>
-            <a:pPr>
-              <a:spcAft>
-                <a:spcPts val="1080"/>
-              </a:spcAft>
-            </a:pPr>
-            <a:r>
-              <a:rPr sz="2400" b="1">
+              <a:t>Cuando el científico decía «No tiene otra opción», muchos se negaban</a:t>
+            </a:r>
+          </a:p>
+          <a:p>
+            <a:pPr>
+              <a:spcAft>
+                <a:spcPts val="1260"/>
+              </a:spcAft>
+            </a:pPr>
+            <a:r>
+              <a:rPr sz="2800" b="1">
                 <a:solidFill>
                   <a:srgbClr val="E8793A"/>
                 </a:solidFill>
                 <a:latin typeface="Nunito Sans"/>
               </a:rPr>
-              <a:t>2. </a:t>
-            </a:r>
-            <a:r>
-              <a:rPr sz="2400" b="0">
+              <a:t>• </a:t>
+            </a:r>
+            <a:r>
+              <a:rPr sz="2800" b="0">
                 <a:solidFill>
                   <a:srgbClr val="1F2A44"/>
                 </a:solidFill>
                 <a:latin typeface="Nunito Sans"/>
               </a:rPr>
-              <a:t>Muchísimos casos no la hacían segura.</a:t>
-            </a:r>
-          </a:p>
-          <a:p>
-            <a:pPr>
-              <a:spcAft>
-                <a:spcPts val="1080"/>
-              </a:spcAft>
-            </a:pPr>
-            <a:r>
-              <a:rPr sz="2400" b="1">
-                <a:solidFill>
-                  <a:srgbClr val="E8793A"/>
-                </a:solidFill>
-                <a:latin typeface="Nunito Sans"/>
-              </a:rPr>
-              <a:t>3. </a:t>
-            </a:r>
-            <a:r>
-              <a:rPr sz="2400" b="0">
-                <a:solidFill>
-                  <a:srgbClr val="1F2A44"/>
-                </a:solidFill>
-                <a:latin typeface="Nunito Sans"/>
-              </a:rPr>
-              <a:t>Bastó ver cisnes negros para tumbarla.</a:t>
-            </a:r>
-          </a:p>
-          <a:p>
-            <a:pPr>
-              <a:spcAft>
-                <a:spcPts val="1080"/>
-              </a:spcAft>
-            </a:pPr>
-            <a:r>
-              <a:rPr sz="2400" b="1">
-                <a:solidFill>
-                  <a:srgbClr val="E8793A"/>
-                </a:solidFill>
-                <a:latin typeface="Nunito Sans"/>
-              </a:rPr>
-              <a:t>4. </a:t>
-            </a:r>
-            <a:r>
-              <a:rPr sz="2400" b="0">
-                <a:solidFill>
-                  <a:srgbClr val="1F2A44"/>
-                </a:solidFill>
-                <a:latin typeface="Nunito Sans"/>
-              </a:rPr>
-              <a:t>Conclusión: una inducción puede fallar, aunque tenga muchos casos. Lo veremos en la sesión 11.</a:t>
+              <a:t>Quizá muchos no obedecían a ciegas: creían que ayudaban a la ciencia</a:t>
             </a:r>
           </a:p>
         </p:txBody>
@@ -4585,6 +4527,581 @@
 </file>
 
 <file path=ppt/slides/slide13.xml><?xml version="1.0" encoding="utf-8"?>
+<p:sld xmlns:a="http://schemas.openxmlformats.org/drawingml/2006/main" xmlns:p="http://schemas.openxmlformats.org/presentationml/2006/main" xmlns:r="http://schemas.openxmlformats.org/officeDocument/2006/relationships">
+  <p:cSld>
+    <p:bg>
+      <p:bgPr>
+        <a:solidFill>
+          <a:srgbClr val="1F2A44"/>
+        </a:solidFill>
+        <a:effectLst/>
+      </p:bgPr>
+    </p:bg>
+    <p:spTree>
+      <p:nvGrpSpPr>
+        <p:cNvPr id="1" name=""/>
+        <p:cNvGrpSpPr/>
+        <p:nvPr/>
+      </p:nvGrpSpPr>
+      <p:grpSpPr/>
+      <p:sp>
+        <p:nvSpPr>
+          <p:cNvPr id="2" name="TextBox 1"/>
+          <p:cNvSpPr txBox="1"/>
+          <p:nvPr/>
+        </p:nvSpPr>
+        <p:spPr>
+          <a:xfrm>
+            <a:off x="640000" y="2300000"/>
+            <a:ext cx="10912000" cy="500000"/>
+          </a:xfrm>
+          <a:prstGeom prst="rect">
+            <a:avLst/>
+          </a:prstGeom>
+          <a:noFill/>
+        </p:spPr>
+        <p:txBody>
+          <a:bodyPr wrap="square">
+            <a:spAutoFit/>
+          </a:bodyPr>
+          <a:lstStyle/>
+          <a:p>
+            <a:pPr>
+              <a:spcAft>
+                <a:spcPts val="810"/>
+              </a:spcAft>
+            </a:pPr>
+            <a:r>
+              <a:rPr sz="1800" b="1">
+                <a:solidFill>
+                  <a:srgbClr val="F4B183"/>
+                </a:solidFill>
+                <a:latin typeface="Nunito Sans"/>
+              </a:rPr>
+              <a:t>BLOQUE 3</a:t>
+            </a:r>
+          </a:p>
+        </p:txBody>
+      </p:sp>
+      <p:sp>
+        <p:nvSpPr>
+          <p:cNvPr id="3" name="TextBox 2"/>
+          <p:cNvSpPr txBox="1"/>
+          <p:nvPr/>
+        </p:nvSpPr>
+        <p:spPr>
+          <a:xfrm>
+            <a:off x="640000" y="2800000"/>
+            <a:ext cx="10912000" cy="800000"/>
+          </a:xfrm>
+          <a:prstGeom prst="rect">
+            <a:avLst/>
+          </a:prstGeom>
+          <a:noFill/>
+        </p:spPr>
+        <p:txBody>
+          <a:bodyPr wrap="square">
+            <a:spAutoFit/>
+          </a:bodyPr>
+          <a:lstStyle/>
+          <a:p>
+            <a:pPr>
+              <a:spcAft>
+                <a:spcPts val="2160"/>
+              </a:spcAft>
+            </a:pPr>
+            <a:r>
+              <a:rPr sz="4800" b="1">
+                <a:solidFill>
+                  <a:srgbClr val="FBF7EF"/>
+                </a:solidFill>
+                <a:latin typeface="Fredoka"/>
+              </a:rPr>
+              <a:t>Qué aprendemos</a:t>
+            </a:r>
+          </a:p>
+        </p:txBody>
+      </p:sp>
+    </p:spTree>
+  </p:cSld>
+  <p:clrMapOvr>
+    <a:masterClrMapping/>
+  </p:clrMapOvr>
+</p:sld>
+</file>
+
+<file path=ppt/slides/slide14.xml><?xml version="1.0" encoding="utf-8"?>
+<p:sld xmlns:a="http://schemas.openxmlformats.org/drawingml/2006/main" xmlns:p="http://schemas.openxmlformats.org/presentationml/2006/main" xmlns:r="http://schemas.openxmlformats.org/officeDocument/2006/relationships">
+  <p:cSld>
+    <p:bg>
+      <p:bgPr>
+        <a:solidFill>
+          <a:srgbClr val="FBF7EF"/>
+        </a:solidFill>
+        <a:effectLst/>
+      </p:bgPr>
+    </p:bg>
+    <p:spTree>
+      <p:nvGrpSpPr>
+        <p:cNvPr id="1" name=""/>
+        <p:cNvGrpSpPr/>
+        <p:nvPr/>
+      </p:nvGrpSpPr>
+      <p:grpSpPr/>
+      <p:sp>
+        <p:nvSpPr>
+          <p:cNvPr id="2" name="TextBox 1"/>
+          <p:cNvSpPr txBox="1"/>
+          <p:nvPr/>
+        </p:nvSpPr>
+        <p:spPr>
+          <a:xfrm>
+            <a:off x="640000" y="380000"/>
+            <a:ext cx="10912000" cy="420000"/>
+          </a:xfrm>
+          <a:prstGeom prst="rect">
+            <a:avLst/>
+          </a:prstGeom>
+          <a:noFill/>
+        </p:spPr>
+        <p:txBody>
+          <a:bodyPr wrap="square">
+            <a:spAutoFit/>
+          </a:bodyPr>
+          <a:lstStyle/>
+          <a:p>
+            <a:pPr>
+              <a:spcAft>
+                <a:spcPts val="630"/>
+              </a:spcAft>
+            </a:pPr>
+            <a:r>
+              <a:rPr sz="1400" b="1">
+                <a:solidFill>
+                  <a:srgbClr val="E8793A"/>
+                </a:solidFill>
+                <a:latin typeface="Nunito Sans"/>
+              </a:rPr>
+              <a:t>BLOQUE 3 · QUÉ APRENDEMOS</a:t>
+            </a:r>
+          </a:p>
+        </p:txBody>
+      </p:sp>
+      <p:sp>
+        <p:nvSpPr>
+          <p:cNvPr id="3" name="TextBox 2"/>
+          <p:cNvSpPr txBox="1"/>
+          <p:nvPr/>
+        </p:nvSpPr>
+        <p:spPr>
+          <a:xfrm>
+            <a:off x="640000" y="760000"/>
+            <a:ext cx="10912000" cy="800000"/>
+          </a:xfrm>
+          <a:prstGeom prst="rect">
+            <a:avLst/>
+          </a:prstGeom>
+          <a:noFill/>
+        </p:spPr>
+        <p:txBody>
+          <a:bodyPr wrap="square">
+            <a:spAutoFit/>
+          </a:bodyPr>
+          <a:lstStyle/>
+          <a:p>
+            <a:pPr>
+              <a:spcAft>
+                <a:spcPts val="1710"/>
+              </a:spcAft>
+            </a:pPr>
+            <a:r>
+              <a:rPr sz="3800" b="1">
+                <a:solidFill>
+                  <a:srgbClr val="1F2A44"/>
+                </a:solidFill>
+                <a:latin typeface="Fredoka"/>
+              </a:rPr>
+              <a:t>Asch y Milgram</a:t>
+            </a:r>
+          </a:p>
+        </p:txBody>
+      </p:sp>
+      <p:graphicFrame>
+        <p:nvGraphicFramePr>
+          <p:cNvPr id="4" name="Table 3"/>
+          <p:cNvGraphicFramePr>
+            <a:graphicFrameLocks noGrp="1"/>
+          </p:cNvGraphicFramePr>
+          <p:nvPr/>
+        </p:nvGraphicFramePr>
+        <p:xfrm>
+          <a:off x="640000" y="1700000"/>
+          <a:ext cx="10912000" cy="3000000"/>
+        </p:xfrm>
+        <a:graphic>
+          <a:graphicData uri="http://schemas.openxmlformats.org/drawingml/2006/table">
+            <a:tbl>
+              <a:tblPr firstRow="1" bandRow="1">
+                <a:tableStyleId>{5C22544A-7EE6-4342-B048-85BDC9FD1C3A}</a:tableStyleId>
+              </a:tblPr>
+              <a:tblGrid>
+                <a:gridCol w="3637333"/>
+                <a:gridCol w="3637333"/>
+                <a:gridCol w="3637334"/>
+              </a:tblGrid>
+              <a:tr h="600000">
+                <a:tc>
+                  <a:txBody>
+                    <a:bodyPr/>
+                    <a:lstStyle/>
+                    <a:p>
+                      <a:r>
+                        <a:rPr sz="2000" b="1">
+                          <a:solidFill>
+                            <a:srgbClr val="FBF7EF"/>
+                          </a:solidFill>
+                          <a:latin typeface="Fredoka"/>
+                        </a:rPr>
+                        <a:t/>
+                      </a:r>
+                    </a:p>
+                  </a:txBody>
+                  <a:tcPr>
+                    <a:solidFill>
+                      <a:srgbClr val="1F2A44"/>
+                    </a:solidFill>
+                  </a:tcPr>
+                </a:tc>
+                <a:tc>
+                  <a:txBody>
+                    <a:bodyPr/>
+                    <a:lstStyle/>
+                    <a:p>
+                      <a:r>
+                        <a:rPr sz="2000" b="1">
+                          <a:solidFill>
+                            <a:srgbClr val="FBF7EF"/>
+                          </a:solidFill>
+                          <a:latin typeface="Fredoka"/>
+                        </a:rPr>
+                        <a:t>Asch</a:t>
+                      </a:r>
+                    </a:p>
+                  </a:txBody>
+                  <a:tcPr>
+                    <a:solidFill>
+                      <a:srgbClr val="1F2A44"/>
+                    </a:solidFill>
+                  </a:tcPr>
+                </a:tc>
+                <a:tc>
+                  <a:txBody>
+                    <a:bodyPr/>
+                    <a:lstStyle/>
+                    <a:p>
+                      <a:r>
+                        <a:rPr sz="2000" b="1">
+                          <a:solidFill>
+                            <a:srgbClr val="FBF7EF"/>
+                          </a:solidFill>
+                          <a:latin typeface="Fredoka"/>
+                        </a:rPr>
+                        <a:t>Milgram</a:t>
+                      </a:r>
+                    </a:p>
+                  </a:txBody>
+                  <a:tcPr>
+                    <a:solidFill>
+                      <a:srgbClr val="1F2A44"/>
+                    </a:solidFill>
+                  </a:tcPr>
+                </a:tc>
+              </a:tr>
+              <a:tr h="600000">
+                <a:tc>
+                  <a:txBody>
+                    <a:bodyPr/>
+                    <a:lstStyle/>
+                    <a:p>
+                      <a:r>
+                        <a:rPr sz="2000" b="1">
+                          <a:solidFill>
+                            <a:srgbClr val="1F2A44"/>
+                          </a:solidFill>
+                          <a:latin typeface="Nunito Sans"/>
+                        </a:rPr>
+                        <a:t>Qué estudia</a:t>
+                      </a:r>
+                    </a:p>
+                  </a:txBody>
+                  <a:tcPr>
+                    <a:solidFill>
+                      <a:srgbClr val="FFFFFF"/>
+                    </a:solidFill>
+                  </a:tcPr>
+                </a:tc>
+                <a:tc>
+                  <a:txBody>
+                    <a:bodyPr/>
+                    <a:lstStyle/>
+                    <a:p>
+                      <a:r>
+                        <a:rPr sz="2000" b="0">
+                          <a:solidFill>
+                            <a:srgbClr val="1F2A44"/>
+                          </a:solidFill>
+                          <a:latin typeface="Nunito Sans"/>
+                        </a:rPr>
+                        <a:t>Conformidad: seguir al grupo</a:t>
+                      </a:r>
+                    </a:p>
+                  </a:txBody>
+                  <a:tcPr>
+                    <a:solidFill>
+                      <a:srgbClr val="FFFFFF"/>
+                    </a:solidFill>
+                  </a:tcPr>
+                </a:tc>
+                <a:tc>
+                  <a:txBody>
+                    <a:bodyPr/>
+                    <a:lstStyle/>
+                    <a:p>
+                      <a:r>
+                        <a:rPr sz="2000" b="0">
+                          <a:solidFill>
+                            <a:srgbClr val="1F2A44"/>
+                          </a:solidFill>
+                          <a:latin typeface="Nunito Sans"/>
+                        </a:rPr>
+                        <a:t>Obediencia: seguir a una autoridad</a:t>
+                      </a:r>
+                    </a:p>
+                  </a:txBody>
+                  <a:tcPr>
+                    <a:solidFill>
+                      <a:srgbClr val="FFFFFF"/>
+                    </a:solidFill>
+                  </a:tcPr>
+                </a:tc>
+              </a:tr>
+              <a:tr h="600000">
+                <a:tc>
+                  <a:txBody>
+                    <a:bodyPr/>
+                    <a:lstStyle/>
+                    <a:p>
+                      <a:r>
+                        <a:rPr sz="2000" b="1">
+                          <a:solidFill>
+                            <a:srgbClr val="1F2A44"/>
+                          </a:solidFill>
+                          <a:latin typeface="Nunito Sans"/>
+                        </a:rPr>
+                        <a:t>Quién presiona</a:t>
+                      </a:r>
+                    </a:p>
+                  </a:txBody>
+                  <a:tcPr>
+                    <a:solidFill>
+                      <a:srgbClr val="EAF0F7"/>
+                    </a:solidFill>
+                  </a:tcPr>
+                </a:tc>
+                <a:tc>
+                  <a:txBody>
+                    <a:bodyPr/>
+                    <a:lstStyle/>
+                    <a:p>
+                      <a:r>
+                        <a:rPr sz="2000" b="0">
+                          <a:solidFill>
+                            <a:srgbClr val="1F2A44"/>
+                          </a:solidFill>
+                          <a:latin typeface="Nunito Sans"/>
+                        </a:rPr>
+                        <a:t>Un grupo de iguales</a:t>
+                      </a:r>
+                    </a:p>
+                  </a:txBody>
+                  <a:tcPr>
+                    <a:solidFill>
+                      <a:srgbClr val="EAF0F7"/>
+                    </a:solidFill>
+                  </a:tcPr>
+                </a:tc>
+                <a:tc>
+                  <a:txBody>
+                    <a:bodyPr/>
+                    <a:lstStyle/>
+                    <a:p>
+                      <a:r>
+                        <a:rPr sz="2000" b="0">
+                          <a:solidFill>
+                            <a:srgbClr val="1F2A44"/>
+                          </a:solidFill>
+                          <a:latin typeface="Nunito Sans"/>
+                        </a:rPr>
+                        <a:t>Un científico con bata</a:t>
+                      </a:r>
+                    </a:p>
+                  </a:txBody>
+                  <a:tcPr>
+                    <a:solidFill>
+                      <a:srgbClr val="EAF0F7"/>
+                    </a:solidFill>
+                  </a:tcPr>
+                </a:tc>
+              </a:tr>
+              <a:tr h="600000">
+                <a:tc>
+                  <a:txBody>
+                    <a:bodyPr/>
+                    <a:lstStyle/>
+                    <a:p>
+                      <a:r>
+                        <a:rPr sz="2000" b="1">
+                          <a:solidFill>
+                            <a:srgbClr val="1F2A44"/>
+                          </a:solidFill>
+                          <a:latin typeface="Nunito Sans"/>
+                        </a:rPr>
+                        <a:t>Qué pasó</a:t>
+                      </a:r>
+                    </a:p>
+                  </a:txBody>
+                  <a:tcPr>
+                    <a:solidFill>
+                      <a:srgbClr val="FFFFFF"/>
+                    </a:solidFill>
+                  </a:tcPr>
+                </a:tc>
+                <a:tc>
+                  <a:txBody>
+                    <a:bodyPr/>
+                    <a:lstStyle/>
+                    <a:p>
+                      <a:r>
+                        <a:rPr sz="2000" b="0">
+                          <a:solidFill>
+                            <a:srgbClr val="1F2A44"/>
+                          </a:solidFill>
+                          <a:latin typeface="Nunito Sans"/>
+                        </a:rPr>
+                        <a:t>3 de cada 4 cedieron alguna vez; 1 de cada 4, nunca</a:t>
+                      </a:r>
+                    </a:p>
+                  </a:txBody>
+                  <a:tcPr>
+                    <a:solidFill>
+                      <a:srgbClr val="FFFFFF"/>
+                    </a:solidFill>
+                  </a:tcPr>
+                </a:tc>
+                <a:tc>
+                  <a:txBody>
+                    <a:bodyPr/>
+                    <a:lstStyle/>
+                    <a:p>
+                      <a:r>
+                        <a:rPr sz="2000" b="0">
+                          <a:solidFill>
+                            <a:srgbClr val="1F2A44"/>
+                          </a:solidFill>
+                          <a:latin typeface="Nunito Sans"/>
+                        </a:rPr>
+                        <a:t>El 65 % llegó al final en la versión más conocida</a:t>
+                      </a:r>
+                    </a:p>
+                  </a:txBody>
+                  <a:tcPr>
+                    <a:solidFill>
+                      <a:srgbClr val="FFFFFF"/>
+                    </a:solidFill>
+                  </a:tcPr>
+                </a:tc>
+              </a:tr>
+              <a:tr h="600000">
+                <a:tc>
+                  <a:txBody>
+                    <a:bodyPr/>
+                    <a:lstStyle/>
+                    <a:p>
+                      <a:r>
+                        <a:rPr sz="2000" b="1">
+                          <a:solidFill>
+                            <a:srgbClr val="1F2A44"/>
+                          </a:solidFill>
+                          <a:latin typeface="Nunito Sans"/>
+                        </a:rPr>
+                        <a:t>Qué ayudó a resistir</a:t>
+                      </a:r>
+                    </a:p>
+                  </a:txBody>
+                  <a:tcPr>
+                    <a:solidFill>
+                      <a:srgbClr val="EAF0F7"/>
+                    </a:solidFill>
+                  </a:tcPr>
+                </a:tc>
+                <a:tc>
+                  <a:txBody>
+                    <a:bodyPr/>
+                    <a:lstStyle/>
+                    <a:p>
+                      <a:r>
+                        <a:rPr sz="2000" b="0">
+                          <a:solidFill>
+                            <a:srgbClr val="1F2A44"/>
+                          </a:solidFill>
+                          <a:latin typeface="Nunito Sans"/>
+                        </a:rPr>
+                        <a:t>Tener un aliado</a:t>
+                      </a:r>
+                    </a:p>
+                  </a:txBody>
+                  <a:tcPr>
+                    <a:solidFill>
+                      <a:srgbClr val="EAF0F7"/>
+                    </a:solidFill>
+                  </a:tcPr>
+                </a:tc>
+                <a:tc>
+                  <a:txBody>
+                    <a:bodyPr/>
+                    <a:lstStyle/>
+                    <a:p>
+                      <a:r>
+                        <a:rPr sz="2000" b="0">
+                          <a:solidFill>
+                            <a:srgbClr val="1F2A44"/>
+                          </a:solidFill>
+                          <a:latin typeface="Nunito Sans"/>
+                        </a:rPr>
+                        <a:t>Ver a otros negarse; la autoridad lejos</a:t>
+                      </a:r>
+                    </a:p>
+                  </a:txBody>
+                  <a:tcPr>
+                    <a:solidFill>
+                      <a:srgbClr val="EAF0F7"/>
+                    </a:solidFill>
+                  </a:tcPr>
+                </a:tc>
+              </a:tr>
+            </a:tbl>
+          </a:graphicData>
+        </a:graphic>
+      </p:graphicFrame>
+    </p:spTree>
+  </p:cSld>
+  <p:clrMapOvr>
+    <a:masterClrMapping/>
+  </p:clrMapOvr>
+</p:sld>
+</file>
+
+<file path=ppt/slides/slide15.xml><?xml version="1.0" encoding="utf-8"?>
 <p:sld xmlns:a="http://schemas.openxmlformats.org/drawingml/2006/main" xmlns:p="http://schemas.openxmlformats.org/presentationml/2006/main" xmlns:r="http://schemas.openxmlformats.org/officeDocument/2006/relationships">
   <p:cSld>
     <p:bg>
@@ -4636,7 +5153,7 @@
                 </a:solidFill>
                 <a:latin typeface="Nunito Sans"/>
               </a:rPr>
-              <a:t>CASO TRAMPA · BLOQUE 2 · CASOS RESUELTOS</a:t>
+              <a:t>CASO TRAMPA · BLOQUE 3 · QUÉ APRENDEMOS</a:t>
             </a:r>
           </a:p>
         </p:txBody>
@@ -4675,7 +5192,7 @@
                 </a:solidFill>
                 <a:latin typeface="Fredoka"/>
               </a:rPr>
-              <a:t>⚠ ¿«Todos» + «por tanto» = segura?</a:t>
+              <a:t>⚠ El simulacro de incendio</a:t>
             </a:r>
           </a:p>
         </p:txBody>
@@ -4757,7 +5274,7 @@
                 </a:solidFill>
                 <a:latin typeface="Nunito Sans"/>
               </a:rPr>
-              <a:t>«Todos los de 2.º B tienen Inglés. Un chico tiene Inglés. Por tanto, ese chico es de 2.º B.»</a:t>
+              <a:t>Suena la alarma del simulacro. El profesor dice: «En fila, por la escalera B». Todos salen en fila. Una chica también, sin discutir.</a:t>
             </a:r>
           </a:p>
         </p:txBody>
@@ -4805,7 +5322,7 @@
                 </a:solidFill>
                 <a:latin typeface="Nunito Sans"/>
               </a:rPr>
-              <a:t>Tiene «todos» y «por tanto», como la del reconocimiento médico. ¿La conclusión es segura?</a:t>
+              <a:t>Obedece y hace lo mismo que el grupo… ¿como en Asch y Milgram?</a:t>
             </a:r>
           </a:p>
           <a:p>
@@ -4830,7 +5347,7 @@
                 </a:solidFill>
                 <a:latin typeface="Nunito Sans"/>
               </a:rPr>
-              <a:t>Se parece mucho a la del reconocimiento médico. Pero mira bien el orden.</a:t>
+              <a:t>Sí: obedece a una autoridad y hace lo mismo que los demás.</a:t>
             </a:r>
           </a:p>
           <a:p>
@@ -4855,7 +5372,7 @@
                 </a:solidFill>
                 <a:latin typeface="Nunito Sans"/>
               </a:rPr>
-              <a:t>Las dos premisas pueden ser verdad y ese chico ser de 2.º A, que también tiene Inglés.</a:t>
+              <a:t>Pero la orden es razonable: el profesor conoce el plan de evacuación y no pide hacer daño a nadie.</a:t>
             </a:r>
           </a:p>
           <a:p>
@@ -4880,618 +5397,32 @@
                 </a:solidFill>
                 <a:latin typeface="Nunito Sans"/>
               </a:rPr>
-              <a:t>La conclusión no sale de las premisas: la deducción está </a:t>
-            </a:r>
+              <a:t>En una emergencia, discutir cada orden sería peligroso.</a:t>
+            </a:r>
+          </a:p>
+          <a:p>
+            <a:pPr>
+              <a:spcAft>
+                <a:spcPts val="1080"/>
+              </a:spcAft>
+            </a:pPr>
             <a:r>
               <a:rPr sz="2400" b="1">
                 <a:solidFill>
+                  <a:srgbClr val="E8793A"/>
+                </a:solidFill>
+                <a:latin typeface="Nunito Sans"/>
+              </a:rPr>
+              <a:t>5. </a:t>
+            </a:r>
+            <a:r>
+              <a:rPr sz="2400" b="0">
+                <a:solidFill>
                   <a:srgbClr val="1F2A44"/>
                 </a:solidFill>
                 <a:latin typeface="Nunito Sans"/>
               </a:rPr>
-              <a:t>mal hecha</a:t>
-            </a:r>
-            <a:r>
-              <a:rPr sz="2400" b="0">
-                <a:solidFill>
-                  <a:srgbClr val="1F2A44"/>
-                </a:solidFill>
-                <a:latin typeface="Nunito Sans"/>
-              </a:rPr>
-              <a:t>.</a:t>
-            </a:r>
-          </a:p>
-          <a:p>
-            <a:pPr>
-              <a:spcAft>
-                <a:spcPts val="1080"/>
-              </a:spcAft>
-            </a:pPr>
-            <a:r>
-              <a:rPr sz="2400" b="1">
-                <a:solidFill>
-                  <a:srgbClr val="E8793A"/>
-                </a:solidFill>
-                <a:latin typeface="Nunito Sans"/>
-              </a:rPr>
-              <a:t>5. </a:t>
-            </a:r>
-            <a:r>
-              <a:rPr sz="2400" b="0">
-                <a:solidFill>
-                  <a:srgbClr val="1F2A44"/>
-                </a:solidFill>
-                <a:latin typeface="Nunito Sans"/>
-              </a:rPr>
-              <a:t>Conclusión: no mires solo las palabras. Pregunta: si las premisas son verdad, ¿puede fallar la conclusión?</a:t>
-            </a:r>
-          </a:p>
-        </p:txBody>
-      </p:sp>
-    </p:spTree>
-  </p:cSld>
-  <p:clrMapOvr>
-    <a:masterClrMapping/>
-  </p:clrMapOvr>
-</p:sld>
-</file>
-
-<file path=ppt/slides/slide14.xml><?xml version="1.0" encoding="utf-8"?>
-<p:sld xmlns:a="http://schemas.openxmlformats.org/drawingml/2006/main" xmlns:p="http://schemas.openxmlformats.org/presentationml/2006/main" xmlns:r="http://schemas.openxmlformats.org/officeDocument/2006/relationships">
-  <p:cSld>
-    <p:bg>
-      <p:bgPr>
-        <a:solidFill>
-          <a:srgbClr val="1F2A44"/>
-        </a:solidFill>
-        <a:effectLst/>
-      </p:bgPr>
-    </p:bg>
-    <p:spTree>
-      <p:nvGrpSpPr>
-        <p:cNvPr id="1" name=""/>
-        <p:cNvGrpSpPr/>
-        <p:nvPr/>
-      </p:nvGrpSpPr>
-      <p:grpSpPr/>
-      <p:sp>
-        <p:nvSpPr>
-          <p:cNvPr id="2" name="TextBox 1"/>
-          <p:cNvSpPr txBox="1"/>
-          <p:nvPr/>
-        </p:nvSpPr>
-        <p:spPr>
-          <a:xfrm>
-            <a:off x="640000" y="2300000"/>
-            <a:ext cx="10912000" cy="500000"/>
-          </a:xfrm>
-          <a:prstGeom prst="rect">
-            <a:avLst/>
-          </a:prstGeom>
-          <a:noFill/>
-        </p:spPr>
-        <p:txBody>
-          <a:bodyPr wrap="square">
-            <a:spAutoFit/>
-          </a:bodyPr>
-          <a:lstStyle/>
-          <a:p>
-            <a:pPr>
-              <a:spcAft>
-                <a:spcPts val="810"/>
-              </a:spcAft>
-            </a:pPr>
-            <a:r>
-              <a:rPr sz="1800" b="1">
-                <a:solidFill>
-                  <a:srgbClr val="F4B183"/>
-                </a:solidFill>
-                <a:latin typeface="Nunito Sans"/>
-              </a:rPr>
-              <a:t>BLOQUE 3</a:t>
-            </a:r>
-          </a:p>
-        </p:txBody>
-      </p:sp>
-      <p:sp>
-        <p:nvSpPr>
-          <p:cNvPr id="3" name="TextBox 2"/>
-          <p:cNvSpPr txBox="1"/>
-          <p:nvPr/>
-        </p:nvSpPr>
-        <p:spPr>
-          <a:xfrm>
-            <a:off x="640000" y="2800000"/>
-            <a:ext cx="10912000" cy="800000"/>
-          </a:xfrm>
-          <a:prstGeom prst="rect">
-            <a:avLst/>
-          </a:prstGeom>
-          <a:noFill/>
-        </p:spPr>
-        <p:txBody>
-          <a:bodyPr wrap="square">
-            <a:spAutoFit/>
-          </a:bodyPr>
-          <a:lstStyle/>
-          <a:p>
-            <a:pPr>
-              <a:spcAft>
-                <a:spcPts val="2160"/>
-              </a:spcAft>
-            </a:pPr>
-            <a:r>
-              <a:rPr sz="4800" b="1">
-                <a:solidFill>
-                  <a:srgbClr val="FBF7EF"/>
-                </a:solidFill>
-                <a:latin typeface="Fredoka"/>
-              </a:rPr>
-              <a:t>Errores típicos</a:t>
-            </a:r>
-          </a:p>
-        </p:txBody>
-      </p:sp>
-    </p:spTree>
-  </p:cSld>
-  <p:clrMapOvr>
-    <a:masterClrMapping/>
-  </p:clrMapOvr>
-</p:sld>
-</file>
-
-<file path=ppt/slides/slide15.xml><?xml version="1.0" encoding="utf-8"?>
-<p:sld xmlns:a="http://schemas.openxmlformats.org/drawingml/2006/main" xmlns:p="http://schemas.openxmlformats.org/presentationml/2006/main" xmlns:r="http://schemas.openxmlformats.org/officeDocument/2006/relationships">
-  <p:cSld>
-    <p:bg>
-      <p:bgPr>
-        <a:solidFill>
-          <a:srgbClr val="FBF7EF"/>
-        </a:solidFill>
-        <a:effectLst/>
-      </p:bgPr>
-    </p:bg>
-    <p:spTree>
-      <p:nvGrpSpPr>
-        <p:cNvPr id="1" name=""/>
-        <p:cNvGrpSpPr/>
-        <p:nvPr/>
-      </p:nvGrpSpPr>
-      <p:grpSpPr/>
-      <p:sp>
-        <p:nvSpPr>
-          <p:cNvPr id="2" name="TextBox 1"/>
-          <p:cNvSpPr txBox="1"/>
-          <p:nvPr/>
-        </p:nvSpPr>
-        <p:spPr>
-          <a:xfrm>
-            <a:off x="640000" y="380000"/>
-            <a:ext cx="10912000" cy="420000"/>
-          </a:xfrm>
-          <a:prstGeom prst="rect">
-            <a:avLst/>
-          </a:prstGeom>
-          <a:noFill/>
-        </p:spPr>
-        <p:txBody>
-          <a:bodyPr wrap="square">
-            <a:spAutoFit/>
-          </a:bodyPr>
-          <a:lstStyle/>
-          <a:p>
-            <a:pPr>
-              <a:spcAft>
-                <a:spcPts val="630"/>
-              </a:spcAft>
-            </a:pPr>
-            <a:r>
-              <a:rPr sz="1400" b="1">
-                <a:solidFill>
-                  <a:srgbClr val="E8793A"/>
-                </a:solidFill>
-                <a:latin typeface="Nunito Sans"/>
-              </a:rPr>
-              <a:t>BLOQUE 3 · ERRORES TÍPICOS</a:t>
-            </a:r>
-          </a:p>
-        </p:txBody>
-      </p:sp>
-      <p:sp>
-        <p:nvSpPr>
-          <p:cNvPr id="3" name="TextBox 2"/>
-          <p:cNvSpPr txBox="1"/>
-          <p:nvPr/>
-        </p:nvSpPr>
-        <p:spPr>
-          <a:xfrm>
-            <a:off x="640000" y="760000"/>
-            <a:ext cx="10912000" cy="800000"/>
-          </a:xfrm>
-          <a:prstGeom prst="rect">
-            <a:avLst/>
-          </a:prstGeom>
-          <a:noFill/>
-        </p:spPr>
-        <p:txBody>
-          <a:bodyPr wrap="square">
-            <a:spAutoFit/>
-          </a:bodyPr>
-          <a:lstStyle/>
-          <a:p>
-            <a:pPr>
-              <a:spcAft>
-                <a:spcPts val="1710"/>
-              </a:spcAft>
-            </a:pPr>
-            <a:r>
-              <a:rPr sz="3800" b="1">
-                <a:solidFill>
-                  <a:srgbClr val="1F2A44"/>
-                </a:solidFill>
-                <a:latin typeface="Fredoka"/>
-              </a:rPr>
-              <a:t>Cuidado con estas ideas</a:t>
-            </a:r>
-          </a:p>
-        </p:txBody>
-      </p:sp>
-      <p:sp>
-        <p:nvSpPr>
-          <p:cNvPr id="4" name="Rectangle 3"/>
-          <p:cNvSpPr/>
-          <p:nvPr/>
-        </p:nvSpPr>
-        <p:spPr>
-          <a:xfrm>
-            <a:off x="640000" y="1650000"/>
-            <a:ext cx="5306000" cy="4400000"/>
-          </a:xfrm>
-          <a:prstGeom prst="rect">
-            <a:avLst/>
-          </a:prstGeom>
-          <a:solidFill>
-            <a:srgbClr val="FBE3D2"/>
-          </a:solidFill>
-          <a:ln>
-            <a:noFill/>
-          </a:ln>
-        </p:spPr>
-        <p:style>
-          <a:lnRef idx="1">
-            <a:schemeClr val="accent1"/>
-          </a:lnRef>
-          <a:fillRef idx="3">
-            <a:schemeClr val="accent1"/>
-          </a:fillRef>
-          <a:effectRef idx="2">
-            <a:schemeClr val="accent1"/>
-          </a:effectRef>
-          <a:fontRef idx="minor">
-            <a:schemeClr val="lt1"/>
-          </a:fontRef>
-        </p:style>
-        <p:txBody>
-          <a:bodyPr rtlCol="0" anchor="ctr"/>
-          <a:lstStyle/>
-          <a:p>
-            <a:pPr algn="ctr"/>
-          </a:p>
-        </p:txBody>
-      </p:sp>
-      <p:sp>
-        <p:nvSpPr>
-          <p:cNvPr id="5" name="TextBox 4"/>
-          <p:cNvSpPr txBox="1"/>
-          <p:nvPr/>
-        </p:nvSpPr>
-        <p:spPr>
-          <a:xfrm>
-            <a:off x="840000" y="1750000"/>
-            <a:ext cx="4906000" cy="600000"/>
-          </a:xfrm>
-          <a:prstGeom prst="rect">
-            <a:avLst/>
-          </a:prstGeom>
-          <a:noFill/>
-        </p:spPr>
-        <p:txBody>
-          <a:bodyPr wrap="square">
-            <a:spAutoFit/>
-          </a:bodyPr>
-          <a:lstStyle/>
-          <a:p>
-            <a:pPr>
-              <a:spcAft>
-                <a:spcPts val="1260"/>
-              </a:spcAft>
-            </a:pPr>
-            <a:r>
-              <a:rPr sz="2800" b="1">
-                <a:solidFill>
-                  <a:srgbClr val="C2531C"/>
-                </a:solidFill>
-                <a:latin typeface="Nunito Sans"/>
-              </a:rPr>
-              <a:t>Error</a:t>
-            </a:r>
-          </a:p>
-        </p:txBody>
-      </p:sp>
-      <p:sp>
-        <p:nvSpPr>
-          <p:cNvPr id="6" name="TextBox 5"/>
-          <p:cNvSpPr txBox="1"/>
-          <p:nvPr/>
-        </p:nvSpPr>
-        <p:spPr>
-          <a:xfrm>
-            <a:off x="840000" y="2400000"/>
-            <a:ext cx="4906000" cy="3500000"/>
-          </a:xfrm>
-          <a:prstGeom prst="rect">
-            <a:avLst/>
-          </a:prstGeom>
-          <a:noFill/>
-        </p:spPr>
-        <p:txBody>
-          <a:bodyPr wrap="square">
-            <a:spAutoFit/>
-          </a:bodyPr>
-          <a:lstStyle/>
-          <a:p>
-            <a:pPr>
-              <a:spcAft>
-                <a:spcPts val="1170"/>
-              </a:spcAft>
-            </a:pPr>
-            <a:r>
-              <a:rPr sz="2600" b="1">
-                <a:solidFill>
-                  <a:srgbClr val="E8793A"/>
-                </a:solidFill>
-                <a:latin typeface="Nunito Sans"/>
-              </a:rPr>
-              <a:t>• </a:t>
-            </a:r>
-            <a:r>
-              <a:rPr sz="2600" b="0">
-                <a:solidFill>
-                  <a:srgbClr val="1F2A44"/>
-                </a:solidFill>
-                <a:latin typeface="Nunito Sans"/>
-              </a:rPr>
-              <a:t>«Es una deducción, así que la conclusión es verdad»</a:t>
-            </a:r>
-          </a:p>
-          <a:p>
-            <a:pPr>
-              <a:spcAft>
-                <a:spcPts val="1170"/>
-              </a:spcAft>
-            </a:pPr>
-            <a:r>
-              <a:rPr sz="2600" b="1">
-                <a:solidFill>
-                  <a:srgbClr val="E8793A"/>
-                </a:solidFill>
-                <a:latin typeface="Nunito Sans"/>
-              </a:rPr>
-              <a:t>• </a:t>
-            </a:r>
-            <a:r>
-              <a:rPr sz="2600" b="0">
-                <a:solidFill>
-                  <a:srgbClr val="1F2A44"/>
-                </a:solidFill>
-                <a:latin typeface="Nunito Sans"/>
-              </a:rPr>
-              <a:t>«Si ha pasado muchas veces, pasará seguro»</a:t>
-            </a:r>
-          </a:p>
-          <a:p>
-            <a:pPr>
-              <a:spcAft>
-                <a:spcPts val="1170"/>
-              </a:spcAft>
-            </a:pPr>
-            <a:r>
-              <a:rPr sz="2600" b="1">
-                <a:solidFill>
-                  <a:srgbClr val="E8793A"/>
-                </a:solidFill>
-                <a:latin typeface="Nunito Sans"/>
-              </a:rPr>
-              <a:t>• </a:t>
-            </a:r>
-            <a:r>
-              <a:rPr sz="2600" b="0">
-                <a:solidFill>
-                  <a:srgbClr val="1F2A44"/>
-                </a:solidFill>
-                <a:latin typeface="Nunito Sans"/>
-              </a:rPr>
-              <a:t>«La inducción no sirve para nada»</a:t>
-            </a:r>
-          </a:p>
-        </p:txBody>
-      </p:sp>
-      <p:sp>
-        <p:nvSpPr>
-          <p:cNvPr id="7" name="Rectangle 6"/>
-          <p:cNvSpPr/>
-          <p:nvPr/>
-        </p:nvSpPr>
-        <p:spPr>
-          <a:xfrm>
-            <a:off x="6246000" y="1650000"/>
-            <a:ext cx="5306000" cy="4400000"/>
-          </a:xfrm>
-          <a:prstGeom prst="rect">
-            <a:avLst/>
-          </a:prstGeom>
-          <a:solidFill>
-            <a:srgbClr val="EAF0F7"/>
-          </a:solidFill>
-          <a:ln>
-            <a:noFill/>
-          </a:ln>
-        </p:spPr>
-        <p:style>
-          <a:lnRef idx="1">
-            <a:schemeClr val="accent1"/>
-          </a:lnRef>
-          <a:fillRef idx="3">
-            <a:schemeClr val="accent1"/>
-          </a:fillRef>
-          <a:effectRef idx="2">
-            <a:schemeClr val="accent1"/>
-          </a:effectRef>
-          <a:fontRef idx="minor">
-            <a:schemeClr val="lt1"/>
-          </a:fontRef>
-        </p:style>
-        <p:txBody>
-          <a:bodyPr rtlCol="0" anchor="ctr"/>
-          <a:lstStyle/>
-          <a:p>
-            <a:pPr algn="ctr"/>
-          </a:p>
-        </p:txBody>
-      </p:sp>
-      <p:sp>
-        <p:nvSpPr>
-          <p:cNvPr id="8" name="TextBox 7"/>
-          <p:cNvSpPr txBox="1"/>
-          <p:nvPr/>
-        </p:nvSpPr>
-        <p:spPr>
-          <a:xfrm>
-            <a:off x="6446000" y="1750000"/>
-            <a:ext cx="4906000" cy="600000"/>
-          </a:xfrm>
-          <a:prstGeom prst="rect">
-            <a:avLst/>
-          </a:prstGeom>
-          <a:noFill/>
-        </p:spPr>
-        <p:txBody>
-          <a:bodyPr wrap="square">
-            <a:spAutoFit/>
-          </a:bodyPr>
-          <a:lstStyle/>
-          <a:p>
-            <a:pPr>
-              <a:spcAft>
-                <a:spcPts val="1260"/>
-              </a:spcAft>
-            </a:pPr>
-            <a:r>
-              <a:rPr sz="2800" b="1">
-                <a:solidFill>
-                  <a:srgbClr val="2F6FB5"/>
-                </a:solidFill>
-                <a:latin typeface="Nunito Sans"/>
-              </a:rPr>
-              <a:t>Mejor así</a:t>
-            </a:r>
-          </a:p>
-        </p:txBody>
-      </p:sp>
-      <p:sp>
-        <p:nvSpPr>
-          <p:cNvPr id="9" name="TextBox 8"/>
-          <p:cNvSpPr txBox="1"/>
-          <p:nvPr/>
-        </p:nvSpPr>
-        <p:spPr>
-          <a:xfrm>
-            <a:off x="6446000" y="2400000"/>
-            <a:ext cx="4906000" cy="3500000"/>
-          </a:xfrm>
-          <a:prstGeom prst="rect">
-            <a:avLst/>
-          </a:prstGeom>
-          <a:noFill/>
-        </p:spPr>
-        <p:txBody>
-          <a:bodyPr wrap="square">
-            <a:spAutoFit/>
-          </a:bodyPr>
-          <a:lstStyle/>
-          <a:p>
-            <a:pPr>
-              <a:spcAft>
-                <a:spcPts val="1170"/>
-              </a:spcAft>
-            </a:pPr>
-            <a:r>
-              <a:rPr sz="2600" b="1">
-                <a:solidFill>
-                  <a:srgbClr val="E8793A"/>
-                </a:solidFill>
-                <a:latin typeface="Nunito Sans"/>
-              </a:rPr>
-              <a:t>• </a:t>
-            </a:r>
-            <a:r>
-              <a:rPr sz="2600" b="0">
-                <a:solidFill>
-                  <a:srgbClr val="1F2A44"/>
-                </a:solidFill>
-                <a:latin typeface="Nunito Sans"/>
-              </a:rPr>
-              <a:t>La deducción asegura solo si está bien hecha y las premisas son verdad</a:t>
-            </a:r>
-          </a:p>
-          <a:p>
-            <a:pPr>
-              <a:spcAft>
-                <a:spcPts val="1170"/>
-              </a:spcAft>
-            </a:pPr>
-            <a:r>
-              <a:rPr sz="2600" b="1">
-                <a:solidFill>
-                  <a:srgbClr val="E8793A"/>
-                </a:solidFill>
-                <a:latin typeface="Nunito Sans"/>
-              </a:rPr>
-              <a:t>• </a:t>
-            </a:r>
-            <a:r>
-              <a:rPr sz="2600" b="0">
-                <a:solidFill>
-                  <a:srgbClr val="1F2A44"/>
-                </a:solidFill>
-                <a:latin typeface="Nunito Sans"/>
-              </a:rPr>
-              <a:t>La inducción es muy útil: la usamos cada día</a:t>
-            </a:r>
-          </a:p>
-          <a:p>
-            <a:pPr>
-              <a:spcAft>
-                <a:spcPts val="1170"/>
-              </a:spcAft>
-            </a:pPr>
-            <a:r>
-              <a:rPr sz="2600" b="1">
-                <a:solidFill>
-                  <a:srgbClr val="E8793A"/>
-                </a:solidFill>
-                <a:latin typeface="Nunito Sans"/>
-              </a:rPr>
-              <a:t>• </a:t>
-            </a:r>
-            <a:r>
-              <a:rPr sz="2600" b="0">
-                <a:solidFill>
-                  <a:srgbClr val="1F2A44"/>
-                </a:solidFill>
-                <a:latin typeface="Nunito Sans"/>
-              </a:rPr>
-              <a:t>Cuantos más casos y más variados, más probable</a:t>
+              <a:t>Conclusión: obedecer o seguir al grupo no es malo en sí. Lo malo es hacerlo cuando te piden algo que está mal.</a:t>
             </a:r>
           </a:p>
         </p:txBody>
@@ -5747,7 +5678,7 @@
                 </a:solidFill>
                 <a:latin typeface="Nunito Sans"/>
               </a:rPr>
-              <a:t>En una deducción bien hecha, si las premisas son verdad, la conclusión es segura.</a:t>
+              <a:t>Asch: muchos cedieron alguna vez ante el grupo, aunque la mayoría de respuestas fueron correctas.</a:t>
             </a:r>
           </a:p>
           <a:p>
@@ -5772,7 +5703,7 @@
                 </a:solidFill>
                 <a:latin typeface="Nunito Sans"/>
               </a:rPr>
-              <a:t>En una inducción, las premisas apoyan la conclusión, pero solo la hacen probable.</a:t>
+              <a:t>Milgram: muchos obedecieron hasta el final, pero cuántos depende mucho de la situación.</a:t>
             </a:r>
           </a:p>
           <a:p>
@@ -5797,7 +5728,7 @@
                 </a:solidFill>
                 <a:latin typeface="Nunito Sans"/>
               </a:rPr>
-              <a:t>Cuantos más casos, y más variados, más fuerte es una inducción.</a:t>
+              <a:t>Un solo aliado ayuda a resistir, y tú puedes ser ese aliado.</a:t>
             </a:r>
           </a:p>
         </p:txBody>
@@ -5901,7 +5832,7 @@
                 </a:solidFill>
                 <a:latin typeface="Fredoka"/>
               </a:rPr>
-              <a:t>Razonamiento deductivo e inductivo</a:t>
+              <a:t>El experimento de Asch sobre la conformidad (y, si hay tiempo, el de Milgram)</a:t>
             </a:r>
           </a:p>
         </p:txBody>
@@ -5940,7 +5871,7 @@
                 </a:solidFill>
                 <a:latin typeface="Nunito Sans"/>
               </a:rPr>
-              <a:t>Ver otros ejemplos de conclusiones seguras y conclusiones probables.</a:t>
+              <a:t>Ver a personas reales dudando ante el grupo. Revisar antes: algunas imágenes de Milgram pueden impresionar.</a:t>
             </a:r>
           </a:p>
         </p:txBody>
@@ -6598,7 +6529,7 @@
                 </a:solidFill>
                 <a:latin typeface="Nunito Sans"/>
               </a:rPr>
-              <a:t>Una ______ razón pasa las tres preguntas.  (sesión 9)</a:t>
+              <a:t>Los «me gusta» de un vídeo miden si algo gusta, no si es ______.  (sesión 9)</a:t>
             </a:r>
           </a:p>
           <a:p>
@@ -6623,7 +6554,7 @@
                 </a:solidFill>
                 <a:latin typeface="Nunito Sans"/>
               </a:rPr>
-              <a:t>La segunda pregunta de una buena razón es: «¿Viene a ______?», es decir, ¿tiene que ver con la conclusión?  (sesión 9)</a:t>
+              <a:t>Que muchos crean algo no es ______ de que sea verdad: la mayoría también se equivoca.  (sesión 9)</a:t>
             </a:r>
           </a:p>
           <a:p>
@@ -6648,7 +6579,7 @@
                 </a:solidFill>
                 <a:latin typeface="Nunito Sans"/>
               </a:rPr>
-              <a:t>El problema no es tener estas creencias, sino no ______ nunca.  (sesión 5)</a:t>
+              <a:t>Costumbre, grupo, autoridad y ______ pueden acertar o fallar: hay que revisarlas.  (sesión 5)</a:t>
             </a:r>
           </a:p>
         </p:txBody>
@@ -6800,7 +6731,7 @@
                 </a:solidFill>
                 <a:latin typeface="Nunito Sans"/>
               </a:rPr>
-              <a:t>Una </a:t>
+              <a:t>Los «me gusta» de un vídeo miden si algo gusta, no si es </a:t>
             </a:r>
             <a:r>
               <a:rPr sz="2600" b="1">
@@ -6809,7 +6740,7 @@
                 </a:solidFill>
                 <a:latin typeface="Nunito Sans"/>
               </a:rPr>
-              <a:t>buena</a:t>
+              <a:t>verdad</a:t>
             </a:r>
             <a:r>
               <a:rPr sz="2600" b="0">
@@ -6818,7 +6749,7 @@
                 </a:solidFill>
                 <a:latin typeface="Nunito Sans"/>
               </a:rPr>
-              <a:t> razón pasa las tres preguntas.  (sesión 9)</a:t>
+              <a:t>.  (sesión 9)</a:t>
             </a:r>
           </a:p>
           <a:p>
@@ -6843,7 +6774,7 @@
                 </a:solidFill>
                 <a:latin typeface="Nunito Sans"/>
               </a:rPr>
-              <a:t>La segunda pregunta de una buena razón es: «¿Viene a </a:t>
+              <a:t>Que muchos crean algo no es </a:t>
             </a:r>
             <a:r>
               <a:rPr sz="2600" b="1">
@@ -6852,7 +6783,7 @@
                 </a:solidFill>
                 <a:latin typeface="Nunito Sans"/>
               </a:rPr>
-              <a:t>cuento</a:t>
+              <a:t>prueba</a:t>
             </a:r>
             <a:r>
               <a:rPr sz="2600" b="0">
@@ -6861,7 +6792,7 @@
                 </a:solidFill>
                 <a:latin typeface="Nunito Sans"/>
               </a:rPr>
-              <a:t>?», es decir, ¿tiene que ver con la conclusión?  (sesión 9)</a:t>
+              <a:t> de que sea verdad: la mayoría también se equivoca.  (sesión 9)</a:t>
             </a:r>
           </a:p>
           <a:p>
@@ -6886,7 +6817,7 @@
                 </a:solidFill>
                 <a:latin typeface="Nunito Sans"/>
               </a:rPr>
-              <a:t>El problema no es tener estas creencias, sino no </a:t>
+              <a:t>Costumbre, grupo, autoridad y </a:t>
             </a:r>
             <a:r>
               <a:rPr sz="2600" b="1">
@@ -6895,7 +6826,7 @@
                 </a:solidFill>
                 <a:latin typeface="Nunito Sans"/>
               </a:rPr>
-              <a:t>revisarlas</a:t>
+              <a:t>emoción</a:t>
             </a:r>
             <a:r>
               <a:rPr sz="2600" b="0">
@@ -6904,7 +6835,7 @@
                 </a:solidFill>
                 <a:latin typeface="Nunito Sans"/>
               </a:rPr>
-              <a:t> nunca.  (sesión 5)</a:t>
+              <a:t> pueden acertar o fallar: hay que revisarlas.  (sesión 5)</a:t>
             </a:r>
           </a:p>
         </p:txBody>
@@ -7051,7 +6982,7 @@
                 </a:solidFill>
                 <a:latin typeface="Nunito Sans"/>
               </a:rPr>
-              <a:t>Un chico: «Todas las veces que he pedido pizza en ese sitio ha llegado fría. Hoy también llegará fría».</a:t>
+              <a:t>Siete personas dicen en voz alta una respuesta que tú ves clarísimamente que está mal. Ahora te toca a ti.</a:t>
             </a:r>
           </a:p>
         </p:txBody>
@@ -7090,7 +7021,7 @@
                 </a:solidFill>
                 <a:latin typeface="Nunito Sans"/>
               </a:rPr>
-              <a:t>¿Es seguro que hoy llegará fría? ¿O solo es probable?</a:t>
+              <a:t>¿Dirías lo que ves o lo mismo que ellos?</a:t>
             </a:r>
           </a:p>
         </p:txBody>
@@ -7194,7 +7125,7 @@
                 </a:solidFill>
                 <a:latin typeface="Fredoka"/>
               </a:rPr>
-              <a:t>Dos formas de razonar</a:t>
+              <a:t>Asch: seguir al grupo (1951)</a:t>
             </a:r>
           </a:p>
         </p:txBody>
@@ -7259,7 +7190,7 @@
                 </a:solidFill>
                 <a:latin typeface="Nunito Sans"/>
               </a:rPr>
-              <a:t>BLOQUE 1 · DOS FORMAS DE RAZONAR</a:t>
+              <a:t>BLOQUE 1 · ASCH: SEGUIR AL GRUPO (1951)</a:t>
             </a:r>
           </a:p>
         </p:txBody>
@@ -7298,7 +7229,7 @@
                 </a:solidFill>
                 <a:latin typeface="Fredoka"/>
               </a:rPr>
-              <a:t>Deducción</a:t>
+              <a:t>Conformidad</a:t>
             </a:r>
           </a:p>
         </p:txBody>
@@ -7380,25 +7311,7 @@
                 </a:solidFill>
                 <a:latin typeface="Nunito Sans"/>
               </a:rPr>
-              <a:t>En una deducción bien hecha, si las premisas son verdad, la conclusión es </a:t>
-            </a:r>
-            <a:r>
-              <a:rPr sz="2800" b="1">
-                <a:solidFill>
-                  <a:srgbClr val="1F2A44"/>
-                </a:solidFill>
-                <a:latin typeface="Nunito Sans"/>
-              </a:rPr>
-              <a:t>segura</a:t>
-            </a:r>
-            <a:r>
-              <a:rPr sz="2800" b="1">
-                <a:solidFill>
-                  <a:srgbClr val="1F2A44"/>
-                </a:solidFill>
-                <a:latin typeface="Nunito Sans"/>
-              </a:rPr>
-              <a:t>: tiene que ser verdad.</a:t>
+              <a:t>La conformidad es cambiar lo que decimos o hacemos para coincidir con el grupo.</a:t>
             </a:r>
           </a:p>
         </p:txBody>
@@ -7446,7 +7359,25 @@
                 </a:solidFill>
                 <a:latin typeface="Nunito Sans"/>
               </a:rPr>
-              <a:t>P1: Todos los alumnos de 2.º tienen Inglés</a:t>
+              <a:t>La estudió el psicólogo </a:t>
+            </a:r>
+            <a:r>
+              <a:rPr sz="2800" b="1">
+                <a:solidFill>
+                  <a:srgbClr val="1F2A44"/>
+                </a:solidFill>
+                <a:latin typeface="Nunito Sans"/>
+              </a:rPr>
+              <a:t>Solomon Asch</a:t>
+            </a:r>
+            <a:r>
+              <a:rPr sz="2800" b="0">
+                <a:solidFill>
+                  <a:srgbClr val="1F2A44"/>
+                </a:solidFill>
+                <a:latin typeface="Nunito Sans"/>
+              </a:rPr>
+              <a:t>, en Estados Unidos</a:t>
             </a:r>
           </a:p>
           <a:p>
@@ -7471,7 +7402,7 @@
                 </a:solidFill>
                 <a:latin typeface="Nunito Sans"/>
               </a:rPr>
-              <a:t>P2: un chico es de 2.º</a:t>
+              <a:t>Pasa aunque el grupo esté equivocado</a:t>
             </a:r>
           </a:p>
           <a:p>
@@ -7496,7 +7427,7 @@
                 </a:solidFill>
                 <a:latin typeface="Nunito Sans"/>
               </a:rPr>
-              <a:t>C: Por tanto, ese chico tiene Inglés</a:t>
+              <a:t>Recuerda la sesión 9: la prueba social</a:t>
             </a:r>
           </a:p>
         </p:txBody>
@@ -7561,7 +7492,7 @@
                 </a:solidFill>
                 <a:latin typeface="Nunito Sans"/>
               </a:rPr>
-              <a:t>BLOQUE 1 · DOS FORMAS DE RAZONAR</a:t>
+              <a:t>BLOQUE 1 · ASCH: SEGUIR AL GRUPO (1951)</a:t>
             </a:r>
           </a:p>
         </p:txBody>
@@ -7600,7 +7531,7 @@
                 </a:solidFill>
                 <a:latin typeface="Fredoka"/>
               </a:rPr>
-              <a:t>Inducción</a:t>
+              <a:t>Así era el experimento de Asch</a:t>
             </a:r>
           </a:p>
         </p:txBody>
@@ -7613,14 +7544,14 @@
         </p:nvSpPr>
         <p:spPr>
           <a:xfrm>
-            <a:off x="640000" y="1650000"/>
-            <a:ext cx="10912000" cy="1150000"/>
+            <a:off x="640000" y="1600000"/>
+            <a:ext cx="10912000" cy="1100000"/>
           </a:xfrm>
           <a:prstGeom prst="rect">
             <a:avLst/>
           </a:prstGeom>
           <a:solidFill>
-            <a:srgbClr val="EAF0F7"/>
+            <a:srgbClr val="FFFFFF"/>
           </a:solidFill>
           <a:ln>
             <a:noFill/>
@@ -7656,7 +7587,7 @@
         </p:nvSpPr>
         <p:spPr>
           <a:xfrm>
-            <a:off x="840000" y="1730000"/>
+            <a:off x="840000" y="1650000"/>
             <a:ext cx="10512000" cy="1000000"/>
           </a:xfrm>
           <a:prstGeom prst="rect">
@@ -7672,53 +7603,17 @@
           <a:p>
             <a:pPr>
               <a:spcAft>
-                <a:spcPts val="1260"/>
-              </a:spcAft>
-            </a:pPr>
-            <a:r>
-              <a:rPr sz="2800" b="1">
+                <a:spcPts val="1170"/>
+              </a:spcAft>
+            </a:pPr>
+            <a:r>
+              <a:rPr sz="2600" b="1">
                 <a:solidFill>
                   <a:srgbClr val="1F2A44"/>
                 </a:solidFill>
                 <a:latin typeface="Nunito Sans"/>
               </a:rPr>
-              <a:t>En una inducción, las premisas </a:t>
-            </a:r>
-            <a:r>
-              <a:rPr sz="2800" b="1">
-                <a:solidFill>
-                  <a:srgbClr val="1F2A44"/>
-                </a:solidFill>
-                <a:latin typeface="Nunito Sans"/>
-              </a:rPr>
-              <a:t>apoyan</a:t>
-            </a:r>
-            <a:r>
-              <a:rPr sz="2800" b="1">
-                <a:solidFill>
-                  <a:srgbClr val="1F2A44"/>
-                </a:solidFill>
-                <a:latin typeface="Nunito Sans"/>
-              </a:rPr>
-              <a:t> la conclusión, pero no la aseguran: es </a:t>
-            </a:r>
-            <a:r>
-              <a:rPr sz="2800" b="1">
-                <a:solidFill>
-                  <a:srgbClr val="1F2A44"/>
-                </a:solidFill>
-                <a:latin typeface="Nunito Sans"/>
-              </a:rPr>
-              <a:t>probable</a:t>
-            </a:r>
-            <a:r>
-              <a:rPr sz="2800" b="1">
-                <a:solidFill>
-                  <a:srgbClr val="1F2A44"/>
-                </a:solidFill>
-                <a:latin typeface="Nunito Sans"/>
-              </a:rPr>
-              <a:t>.</a:t>
+              <a:t>Un grupo mira una línea y dice, uno por uno y en voz alta, cuál de otras tres (A, B o C) mide igual. Es facilísimo.</a:t>
             </a:r>
           </a:p>
         </p:txBody>
@@ -7731,8 +7626,8 @@
         </p:nvSpPr>
         <p:spPr>
           <a:xfrm>
-            <a:off x="640000" y="3000000"/>
-            <a:ext cx="10912000" cy="3458000"/>
+            <a:off x="640000" y="2900000"/>
+            <a:ext cx="10912000" cy="3500000"/>
           </a:xfrm>
           <a:prstGeom prst="rect">
             <a:avLst/>
@@ -7747,101 +7642,119 @@
           <a:p>
             <a:pPr>
               <a:spcAft>
-                <a:spcPts val="1260"/>
-              </a:spcAft>
-            </a:pPr>
-            <a:r>
-              <a:rPr sz="2800" b="1">
+                <a:spcPts val="1080"/>
+              </a:spcAft>
+            </a:pPr>
+            <a:r>
+              <a:rPr sz="2400" b="1">
                 <a:solidFill>
                   <a:srgbClr val="E8793A"/>
                 </a:solidFill>
                 <a:latin typeface="Nunito Sans"/>
               </a:rPr>
-              <a:t>• </a:t>
-            </a:r>
-            <a:r>
-              <a:rPr sz="2800" b="0">
+              <a:t>1. </a:t>
+            </a:r>
+            <a:r>
+              <a:rPr sz="2400" b="0">
                 <a:solidFill>
                   <a:srgbClr val="1F2A44"/>
                 </a:solidFill>
                 <a:latin typeface="Nunito Sans"/>
               </a:rPr>
-              <a:t>Muchas veces parte de casos que hemos visto</a:t>
-            </a:r>
-          </a:p>
-          <a:p>
-            <a:pPr>
-              <a:spcAft>
-                <a:spcPts val="1260"/>
-              </a:spcAft>
-            </a:pPr>
-            <a:r>
-              <a:rPr sz="2800" b="1">
+              <a:t>El truco: todos menos uno eran actores de acuerdo. El participante de verdad contestaba casi el último.</a:t>
+            </a:r>
+          </a:p>
+          <a:p>
+            <a:pPr>
+              <a:spcAft>
+                <a:spcPts val="1080"/>
+              </a:spcAft>
+            </a:pPr>
+            <a:r>
+              <a:rPr sz="2400" b="1">
                 <a:solidFill>
                   <a:srgbClr val="E8793A"/>
                 </a:solidFill>
                 <a:latin typeface="Nunito Sans"/>
               </a:rPr>
-              <a:t>• </a:t>
-            </a:r>
-            <a:r>
-              <a:rPr sz="2800" b="0">
+              <a:t>2. </a:t>
+            </a:r>
+            <a:r>
+              <a:rPr sz="2400" b="0">
                 <a:solidFill>
                   <a:srgbClr val="1F2A44"/>
                 </a:solidFill>
                 <a:latin typeface="Nunito Sans"/>
               </a:rPr>
-              <a:t>Las diez veces que fui al dentista, tuve que esperar</a:t>
-            </a:r>
-          </a:p>
-          <a:p>
-            <a:pPr>
-              <a:spcAft>
-                <a:spcPts val="1260"/>
-              </a:spcAft>
-            </a:pPr>
-            <a:r>
-              <a:rPr sz="2800" b="1">
+              <a:t>En algunas rondas, los actores daban a propósito la misma respuesta equivocada.</a:t>
+            </a:r>
+          </a:p>
+          <a:p>
+            <a:pPr>
+              <a:spcAft>
+                <a:spcPts val="1080"/>
+              </a:spcAft>
+            </a:pPr>
+            <a:r>
+              <a:rPr sz="2400" b="1">
                 <a:solidFill>
                   <a:srgbClr val="E8793A"/>
                 </a:solidFill>
                 <a:latin typeface="Nunito Sans"/>
               </a:rPr>
-              <a:t>• </a:t>
-            </a:r>
-            <a:r>
-              <a:rPr sz="2800" b="0">
+              <a:t>3. </a:t>
+            </a:r>
+            <a:r>
+              <a:rPr sz="2400" b="0">
                 <a:solidFill>
                   <a:srgbClr val="1F2A44"/>
                 </a:solidFill>
                 <a:latin typeface="Nunito Sans"/>
               </a:rPr>
-              <a:t>Por tanto, la próxima vez también esperaré</a:t>
-            </a:r>
-          </a:p>
-          <a:p>
-            <a:pPr>
-              <a:spcAft>
-                <a:spcPts val="1260"/>
-              </a:spcAft>
-            </a:pPr>
-            <a:r>
-              <a:rPr sz="2800" b="1">
+              <a:t>En esas rondas, 2 de cada 3 respuestas fueron correctas. Pero 1 de cada 3 siguió al grupo.</a:t>
+            </a:r>
+          </a:p>
+          <a:p>
+            <a:pPr>
+              <a:spcAft>
+                <a:spcPts val="1080"/>
+              </a:spcAft>
+            </a:pPr>
+            <a:r>
+              <a:rPr sz="2400" b="1">
                 <a:solidFill>
                   <a:srgbClr val="E8793A"/>
                 </a:solidFill>
                 <a:latin typeface="Nunito Sans"/>
               </a:rPr>
-              <a:t>• </a:t>
-            </a:r>
-            <a:r>
-              <a:rPr sz="2800" b="0">
+              <a:t>4. </a:t>
+            </a:r>
+            <a:r>
+              <a:rPr sz="2400" b="0">
                 <a:solidFill>
                   <a:srgbClr val="1F2A44"/>
                 </a:solidFill>
                 <a:latin typeface="Nunito Sans"/>
               </a:rPr>
-              <a:t>Puede fallar: quizá esta vez no haya nadie</a:t>
+              <a:t>Conclusión: unas </a:t>
+            </a:r>
+            <a:r>
+              <a:rPr sz="2400" b="1">
+                <a:solidFill>
+                  <a:srgbClr val="1F2A44"/>
+                </a:solidFill>
+                <a:latin typeface="Nunito Sans"/>
+              </a:rPr>
+              <a:t>3 de cada 4</a:t>
+            </a:r>
+            <a:r>
+              <a:rPr sz="2400" b="0">
+                <a:solidFill>
+                  <a:srgbClr val="1F2A44"/>
+                </a:solidFill>
+                <a:latin typeface="Nunito Sans"/>
+              </a:rPr>
+              <a:t> personas cedieron alguna vez; 1 de cada 4, nunca. Con un aliado, casi todos resistían.</a:t>
             </a:r>
           </a:p>
         </p:txBody>
@@ -7855,6 +7768,110 @@
 </file>
 
 <file path=ppt/slides/slide8.xml><?xml version="1.0" encoding="utf-8"?>
+<p:sld xmlns:a="http://schemas.openxmlformats.org/drawingml/2006/main" xmlns:p="http://schemas.openxmlformats.org/presentationml/2006/main" xmlns:r="http://schemas.openxmlformats.org/officeDocument/2006/relationships">
+  <p:cSld>
+    <p:bg>
+      <p:bgPr>
+        <a:solidFill>
+          <a:srgbClr val="1F2A44"/>
+        </a:solidFill>
+        <a:effectLst/>
+      </p:bgPr>
+    </p:bg>
+    <p:spTree>
+      <p:nvGrpSpPr>
+        <p:cNvPr id="1" name=""/>
+        <p:cNvGrpSpPr/>
+        <p:nvPr/>
+      </p:nvGrpSpPr>
+      <p:grpSpPr/>
+      <p:sp>
+        <p:nvSpPr>
+          <p:cNvPr id="2" name="TextBox 1"/>
+          <p:cNvSpPr txBox="1"/>
+          <p:nvPr/>
+        </p:nvSpPr>
+        <p:spPr>
+          <a:xfrm>
+            <a:off x="640000" y="2300000"/>
+            <a:ext cx="10912000" cy="500000"/>
+          </a:xfrm>
+          <a:prstGeom prst="rect">
+            <a:avLst/>
+          </a:prstGeom>
+          <a:noFill/>
+        </p:spPr>
+        <p:txBody>
+          <a:bodyPr wrap="square">
+            <a:spAutoFit/>
+          </a:bodyPr>
+          <a:lstStyle/>
+          <a:p>
+            <a:pPr>
+              <a:spcAft>
+                <a:spcPts val="810"/>
+              </a:spcAft>
+            </a:pPr>
+            <a:r>
+              <a:rPr sz="1800" b="1">
+                <a:solidFill>
+                  <a:srgbClr val="F4B183"/>
+                </a:solidFill>
+                <a:latin typeface="Nunito Sans"/>
+              </a:rPr>
+              <a:t>BLOQUE 2</a:t>
+            </a:r>
+          </a:p>
+        </p:txBody>
+      </p:sp>
+      <p:sp>
+        <p:nvSpPr>
+          <p:cNvPr id="3" name="TextBox 2"/>
+          <p:cNvSpPr txBox="1"/>
+          <p:nvPr/>
+        </p:nvSpPr>
+        <p:spPr>
+          <a:xfrm>
+            <a:off x="640000" y="2800000"/>
+            <a:ext cx="10912000" cy="800000"/>
+          </a:xfrm>
+          <a:prstGeom prst="rect">
+            <a:avLst/>
+          </a:prstGeom>
+          <a:noFill/>
+        </p:spPr>
+        <p:txBody>
+          <a:bodyPr wrap="square">
+            <a:spAutoFit/>
+          </a:bodyPr>
+          <a:lstStyle/>
+          <a:p>
+            <a:pPr>
+              <a:spcAft>
+                <a:spcPts val="2160"/>
+              </a:spcAft>
+            </a:pPr>
+            <a:r>
+              <a:rPr sz="4800" b="1">
+                <a:solidFill>
+                  <a:srgbClr val="FBF7EF"/>
+                </a:solidFill>
+                <a:latin typeface="Fredoka"/>
+              </a:rPr>
+              <a:t>Milgram: obedecer a una autoridad (1961-1962)</a:t>
+            </a:r>
+          </a:p>
+        </p:txBody>
+      </p:sp>
+    </p:spTree>
+  </p:cSld>
+  <p:clrMapOvr>
+    <a:masterClrMapping/>
+  </p:clrMapOvr>
+</p:sld>
+</file>
+
+<file path=ppt/slides/slide9.xml><?xml version="1.0" encoding="utf-8"?>
 <p:sld xmlns:a="http://schemas.openxmlformats.org/drawingml/2006/main" xmlns:p="http://schemas.openxmlformats.org/presentationml/2006/main" xmlns:r="http://schemas.openxmlformats.org/officeDocument/2006/relationships">
   <p:cSld>
     <p:bg>
@@ -7906,7 +7923,7 @@
                 </a:solidFill>
                 <a:latin typeface="Nunito Sans"/>
               </a:rPr>
-              <a:t>BLOQUE 1 · DOS FORMAS DE RAZONAR</a:t>
+              <a:t>BLOQUE 2 · MILGRAM: OBEDECER A UNA AUTORIDAD (1961-1962)</a:t>
             </a:r>
           </a:p>
         </p:txBody>
@@ -7945,346 +7962,64 @@
                 </a:solidFill>
                 <a:latin typeface="Fredoka"/>
               </a:rPr>
-              <a:t>Deducción e inducción, juntas</a:t>
-            </a:r>
-          </a:p>
-        </p:txBody>
-      </p:sp>
-      <p:graphicFrame>
-        <p:nvGraphicFramePr>
-          <p:cNvPr id="4" name="Table 3"/>
-          <p:cNvGraphicFramePr>
-            <a:graphicFrameLocks noGrp="1"/>
-          </p:cNvGraphicFramePr>
+              <a:t>Obediencia</a:t>
+            </a:r>
+          </a:p>
+        </p:txBody>
+      </p:sp>
+      <p:sp>
+        <p:nvSpPr>
+          <p:cNvPr id="4" name="Rectangle 3"/>
+          <p:cNvSpPr/>
           <p:nvPr/>
-        </p:nvGraphicFramePr>
-        <p:xfrm>
-          <a:off x="640000" y="1700000"/>
-          <a:ext cx="10912000" cy="2400000"/>
-        </p:xfrm>
-        <a:graphic>
-          <a:graphicData uri="http://schemas.openxmlformats.org/drawingml/2006/table">
-            <a:tbl>
-              <a:tblPr firstRow="1" bandRow="1">
-                <a:tableStyleId>{5C22544A-7EE6-4342-B048-85BDC9FD1C3A}</a:tableStyleId>
-              </a:tblPr>
-              <a:tblGrid>
-                <a:gridCol w="3637333"/>
-                <a:gridCol w="3637333"/>
-                <a:gridCol w="3637334"/>
-              </a:tblGrid>
-              <a:tr h="600000">
-                <a:tc>
-                  <a:txBody>
-                    <a:bodyPr/>
-                    <a:lstStyle/>
-                    <a:p>
-                      <a:r>
-                        <a:rPr sz="2000" b="1">
-                          <a:solidFill>
-                            <a:srgbClr val="FBF7EF"/>
-                          </a:solidFill>
-                          <a:latin typeface="Fredoka"/>
-                        </a:rPr>
-                        <a:t>Pregunta</a:t>
-                      </a:r>
-                    </a:p>
-                  </a:txBody>
-                  <a:tcPr>
-                    <a:solidFill>
-                      <a:srgbClr val="1F2A44"/>
-                    </a:solidFill>
-                  </a:tcPr>
-                </a:tc>
-                <a:tc>
-                  <a:txBody>
-                    <a:bodyPr/>
-                    <a:lstStyle/>
-                    <a:p>
-                      <a:r>
-                        <a:rPr sz="2000" b="1">
-                          <a:solidFill>
-                            <a:srgbClr val="FBF7EF"/>
-                          </a:solidFill>
-                          <a:latin typeface="Fredoka"/>
-                        </a:rPr>
-                        <a:t>Deducción</a:t>
-                      </a:r>
-                    </a:p>
-                  </a:txBody>
-                  <a:tcPr>
-                    <a:solidFill>
-                      <a:srgbClr val="1F2A44"/>
-                    </a:solidFill>
-                  </a:tcPr>
-                </a:tc>
-                <a:tc>
-                  <a:txBody>
-                    <a:bodyPr/>
-                    <a:lstStyle/>
-                    <a:p>
-                      <a:r>
-                        <a:rPr sz="2000" b="1">
-                          <a:solidFill>
-                            <a:srgbClr val="FBF7EF"/>
-                          </a:solidFill>
-                          <a:latin typeface="Fredoka"/>
-                        </a:rPr>
-                        <a:t>Inducción</a:t>
-                      </a:r>
-                    </a:p>
-                  </a:txBody>
-                  <a:tcPr>
-                    <a:solidFill>
-                      <a:srgbClr val="1F2A44"/>
-                    </a:solidFill>
-                  </a:tcPr>
-                </a:tc>
-              </a:tr>
-              <a:tr h="600000">
-                <a:tc>
-                  <a:txBody>
-                    <a:bodyPr/>
-                    <a:lstStyle/>
-                    <a:p>
-                      <a:r>
-                        <a:rPr sz="2000" b="0">
-                          <a:solidFill>
-                            <a:srgbClr val="1F2A44"/>
-                          </a:solidFill>
-                          <a:latin typeface="Nunito Sans"/>
-                        </a:rPr>
-                        <a:t>¿Cómo es la conclusión?</a:t>
-                      </a:r>
-                    </a:p>
-                  </a:txBody>
-                  <a:tcPr>
-                    <a:solidFill>
-                      <a:srgbClr val="FFFFFF"/>
-                    </a:solidFill>
-                  </a:tcPr>
-                </a:tc>
-                <a:tc>
-                  <a:txBody>
-                    <a:bodyPr/>
-                    <a:lstStyle/>
-                    <a:p>
-                      <a:r>
-                        <a:rPr sz="2000" b="0">
-                          <a:solidFill>
-                            <a:srgbClr val="1F2A44"/>
-                          </a:solidFill>
-                          <a:latin typeface="Nunito Sans"/>
-                        </a:rPr>
-                        <a:t>Segura, si las premisas son verdad</a:t>
-                      </a:r>
-                    </a:p>
-                  </a:txBody>
-                  <a:tcPr>
-                    <a:solidFill>
-                      <a:srgbClr val="FFFFFF"/>
-                    </a:solidFill>
-                  </a:tcPr>
-                </a:tc>
-                <a:tc>
-                  <a:txBody>
-                    <a:bodyPr/>
-                    <a:lstStyle/>
-                    <a:p>
-                      <a:r>
-                        <a:rPr sz="2000" b="0">
-                          <a:solidFill>
-                            <a:srgbClr val="1F2A44"/>
-                          </a:solidFill>
-                          <a:latin typeface="Nunito Sans"/>
-                        </a:rPr>
-                        <a:t>Probable</a:t>
-                      </a:r>
-                    </a:p>
-                  </a:txBody>
-                  <a:tcPr>
-                    <a:solidFill>
-                      <a:srgbClr val="FFFFFF"/>
-                    </a:solidFill>
-                  </a:tcPr>
-                </a:tc>
-              </a:tr>
-              <a:tr h="600000">
-                <a:tc>
-                  <a:txBody>
-                    <a:bodyPr/>
-                    <a:lstStyle/>
-                    <a:p>
-                      <a:r>
-                        <a:rPr sz="2000" b="0">
-                          <a:solidFill>
-                            <a:srgbClr val="1F2A44"/>
-                          </a:solidFill>
-                          <a:latin typeface="Nunito Sans"/>
-                        </a:rPr>
-                        <a:t>¿Va más allá de las premisas?</a:t>
-                      </a:r>
-                    </a:p>
-                  </a:txBody>
-                  <a:tcPr>
-                    <a:solidFill>
-                      <a:srgbClr val="EAF0F7"/>
-                    </a:solidFill>
-                  </a:tcPr>
-                </a:tc>
-                <a:tc>
-                  <a:txBody>
-                    <a:bodyPr/>
-                    <a:lstStyle/>
-                    <a:p>
-                      <a:r>
-                        <a:rPr sz="2000" b="0">
-                          <a:solidFill>
-                            <a:srgbClr val="1F2A44"/>
-                          </a:solidFill>
-                          <a:latin typeface="Nunito Sans"/>
-                        </a:rPr>
-                        <a:t>No: solo saca lo que ya dicen</a:t>
-                      </a:r>
-                    </a:p>
-                  </a:txBody>
-                  <a:tcPr>
-                    <a:solidFill>
-                      <a:srgbClr val="EAF0F7"/>
-                    </a:solidFill>
-                  </a:tcPr>
-                </a:tc>
-                <a:tc>
-                  <a:txBody>
-                    <a:bodyPr/>
-                    <a:lstStyle/>
-                    <a:p>
-                      <a:r>
-                        <a:rPr sz="2000" b="0">
-                          <a:solidFill>
-                            <a:srgbClr val="1F2A44"/>
-                          </a:solidFill>
-                          <a:latin typeface="Nunito Sans"/>
-                        </a:rPr>
-                        <a:t>Sí: por eso puede fallar</a:t>
-                      </a:r>
-                    </a:p>
-                  </a:txBody>
-                  <a:tcPr>
-                    <a:solidFill>
-                      <a:srgbClr val="EAF0F7"/>
-                    </a:solidFill>
-                  </a:tcPr>
-                </a:tc>
-              </a:tr>
-              <a:tr h="600000">
-                <a:tc>
-                  <a:txBody>
-                    <a:bodyPr/>
-                    <a:lstStyle/>
-                    <a:p>
-                      <a:r>
-                        <a:rPr sz="2000" b="0">
-                          <a:solidFill>
-                            <a:srgbClr val="1F2A44"/>
-                          </a:solidFill>
-                          <a:latin typeface="Nunito Sans"/>
-                        </a:rPr>
-                        <a:t>¿Puede fallar?</a:t>
-                      </a:r>
-                    </a:p>
-                  </a:txBody>
-                  <a:tcPr>
-                    <a:solidFill>
-                      <a:srgbClr val="FFFFFF"/>
-                    </a:solidFill>
-                  </a:tcPr>
-                </a:tc>
-                <a:tc>
-                  <a:txBody>
-                    <a:bodyPr/>
-                    <a:lstStyle/>
-                    <a:p>
-                      <a:r>
-                        <a:rPr sz="2000" b="0">
-                          <a:solidFill>
-                            <a:srgbClr val="1F2A44"/>
-                          </a:solidFill>
-                          <a:latin typeface="Nunito Sans"/>
-                        </a:rPr>
-                        <a:t>No, si está bien hecha y las premisas son verdad</a:t>
-                      </a:r>
-                    </a:p>
-                  </a:txBody>
-                  <a:tcPr>
-                    <a:solidFill>
-                      <a:srgbClr val="FFFFFF"/>
-                    </a:solidFill>
-                  </a:tcPr>
-                </a:tc>
-                <a:tc>
-                  <a:txBody>
-                    <a:bodyPr/>
-                    <a:lstStyle/>
-                    <a:p>
-                      <a:r>
-                        <a:rPr sz="2000" b="0">
-                          <a:solidFill>
-                            <a:srgbClr val="1F2A44"/>
-                          </a:solidFill>
-                          <a:latin typeface="Nunito Sans"/>
-                        </a:rPr>
-                        <a:t>Sí, aunque las premisas sean verdad</a:t>
-                      </a:r>
-                    </a:p>
-                  </a:txBody>
-                  <a:tcPr>
-                    <a:solidFill>
-                      <a:srgbClr val="FFFFFF"/>
-                    </a:solidFill>
-                  </a:tcPr>
-                </a:tc>
-              </a:tr>
-            </a:tbl>
-          </a:graphicData>
-        </a:graphic>
-      </p:graphicFrame>
-    </p:spTree>
-  </p:cSld>
-  <p:clrMapOvr>
-    <a:masterClrMapping/>
-  </p:clrMapOvr>
-</p:sld>
-</file>
-
-<file path=ppt/slides/slide9.xml><?xml version="1.0" encoding="utf-8"?>
-<p:sld xmlns:a="http://schemas.openxmlformats.org/drawingml/2006/main" xmlns:p="http://schemas.openxmlformats.org/presentationml/2006/main" xmlns:r="http://schemas.openxmlformats.org/officeDocument/2006/relationships">
-  <p:cSld>
-    <p:bg>
-      <p:bgPr>
-        <a:solidFill>
-          <a:srgbClr val="1F2A44"/>
-        </a:solidFill>
-        <a:effectLst/>
-      </p:bgPr>
-    </p:bg>
-    <p:spTree>
-      <p:nvGrpSpPr>
-        <p:cNvPr id="1" name=""/>
-        <p:cNvGrpSpPr/>
-        <p:nvPr/>
-      </p:nvGrpSpPr>
-      <p:grpSpPr/>
-      <p:sp>
-        <p:nvSpPr>
-          <p:cNvPr id="2" name="TextBox 1"/>
+        </p:nvSpPr>
+        <p:spPr>
+          <a:xfrm>
+            <a:off x="640000" y="1650000"/>
+            <a:ext cx="10912000" cy="1150000"/>
+          </a:xfrm>
+          <a:prstGeom prst="rect">
+            <a:avLst/>
+          </a:prstGeom>
+          <a:solidFill>
+            <a:srgbClr val="EAF0F7"/>
+          </a:solidFill>
+          <a:ln>
+            <a:noFill/>
+          </a:ln>
+        </p:spPr>
+        <p:style>
+          <a:lnRef idx="1">
+            <a:schemeClr val="accent1"/>
+          </a:lnRef>
+          <a:fillRef idx="3">
+            <a:schemeClr val="accent1"/>
+          </a:fillRef>
+          <a:effectRef idx="2">
+            <a:schemeClr val="accent1"/>
+          </a:effectRef>
+          <a:fontRef idx="minor">
+            <a:schemeClr val="lt1"/>
+          </a:fontRef>
+        </p:style>
+        <p:txBody>
+          <a:bodyPr rtlCol="0" anchor="ctr"/>
+          <a:lstStyle/>
+          <a:p>
+            <a:pPr algn="ctr"/>
+          </a:p>
+        </p:txBody>
+      </p:sp>
+      <p:sp>
+        <p:nvSpPr>
+          <p:cNvPr id="5" name="TextBox 4"/>
           <p:cNvSpPr txBox="1"/>
           <p:nvPr/>
         </p:nvSpPr>
         <p:spPr>
           <a:xfrm>
-            <a:off x="640000" y="2300000"/>
-            <a:ext cx="10912000" cy="500000"/>
+            <a:off x="840000" y="1730000"/>
+            <a:ext cx="10512000" cy="1000000"/>
           </a:xfrm>
           <a:prstGeom prst="rect">
             <a:avLst/>
@@ -8292,38 +8027,38 @@
           <a:noFill/>
         </p:spPr>
         <p:txBody>
-          <a:bodyPr wrap="square">
+          <a:bodyPr wrap="square" anchor="ctr">
             <a:spAutoFit/>
           </a:bodyPr>
           <a:lstStyle/>
           <a:p>
             <a:pPr>
               <a:spcAft>
-                <a:spcPts val="810"/>
-              </a:spcAft>
-            </a:pPr>
-            <a:r>
-              <a:rPr sz="1800" b="1">
-                <a:solidFill>
-                  <a:srgbClr val="F4B183"/>
-                </a:solidFill>
-                <a:latin typeface="Nunito Sans"/>
-              </a:rPr>
-              <a:t>BLOQUE 2</a:t>
-            </a:r>
-          </a:p>
-        </p:txBody>
-      </p:sp>
-      <p:sp>
-        <p:nvSpPr>
-          <p:cNvPr id="3" name="TextBox 2"/>
+                <a:spcPts val="1260"/>
+              </a:spcAft>
+            </a:pPr>
+            <a:r>
+              <a:rPr sz="2800" b="1">
+                <a:solidFill>
+                  <a:srgbClr val="1F2A44"/>
+                </a:solidFill>
+                <a:latin typeface="Nunito Sans"/>
+              </a:rPr>
+              <a:t>La obediencia es hacer lo que manda una autoridad, aunque no estemos de acuerdo.</a:t>
+            </a:r>
+          </a:p>
+        </p:txBody>
+      </p:sp>
+      <p:sp>
+        <p:nvSpPr>
+          <p:cNvPr id="6" name="TextBox 5"/>
           <p:cNvSpPr txBox="1"/>
           <p:nvPr/>
         </p:nvSpPr>
         <p:spPr>
           <a:xfrm>
-            <a:off x="640000" y="2800000"/>
-            <a:ext cx="10912000" cy="800000"/>
+            <a:off x="640000" y="3000000"/>
+            <a:ext cx="10912000" cy="3458000"/>
           </a:xfrm>
           <a:prstGeom prst="rect">
             <a:avLst/>
@@ -8338,17 +8073,85 @@
           <a:p>
             <a:pPr>
               <a:spcAft>
-                <a:spcPts val="2160"/>
-              </a:spcAft>
-            </a:pPr>
-            <a:r>
-              <a:rPr sz="4800" b="1">
-                <a:solidFill>
-                  <a:srgbClr val="FBF7EF"/>
-                </a:solidFill>
-                <a:latin typeface="Fredoka"/>
-              </a:rPr>
-              <a:t>Casos resueltos</a:t>
+                <a:spcPts val="1260"/>
+              </a:spcAft>
+            </a:pPr>
+            <a:r>
+              <a:rPr sz="2800" b="1">
+                <a:solidFill>
+                  <a:srgbClr val="E8793A"/>
+                </a:solidFill>
+                <a:latin typeface="Nunito Sans"/>
+              </a:rPr>
+              <a:t>• </a:t>
+            </a:r>
+            <a:r>
+              <a:rPr sz="2800" b="0">
+                <a:solidFill>
+                  <a:srgbClr val="1F2A44"/>
+                </a:solidFill>
+                <a:latin typeface="Nunito Sans"/>
+              </a:rPr>
+              <a:t>Obedecer normas justas es necesario para convivir</a:t>
+            </a:r>
+          </a:p>
+          <a:p>
+            <a:pPr>
+              <a:spcAft>
+                <a:spcPts val="1260"/>
+              </a:spcAft>
+            </a:pPr>
+            <a:r>
+              <a:rPr sz="2800" b="1">
+                <a:solidFill>
+                  <a:srgbClr val="E8793A"/>
+                </a:solidFill>
+                <a:latin typeface="Nunito Sans"/>
+              </a:rPr>
+              <a:t>• </a:t>
+            </a:r>
+            <a:r>
+              <a:rPr sz="2800" b="0">
+                <a:solidFill>
+                  <a:srgbClr val="1F2A44"/>
+                </a:solidFill>
+                <a:latin typeface="Nunito Sans"/>
+              </a:rPr>
+              <a:t>El problema es obedecer </a:t>
+            </a:r>
+            <a:r>
+              <a:rPr sz="2800" b="1">
+                <a:solidFill>
+                  <a:srgbClr val="1F2A44"/>
+                </a:solidFill>
+                <a:latin typeface="Nunito Sans"/>
+              </a:rPr>
+              <a:t>sin pensar</a:t>
+            </a:r>
+          </a:p>
+          <a:p>
+            <a:pPr>
+              <a:spcAft>
+                <a:spcPts val="1260"/>
+              </a:spcAft>
+            </a:pPr>
+            <a:r>
+              <a:rPr sz="2800" b="1">
+                <a:solidFill>
+                  <a:srgbClr val="E8793A"/>
+                </a:solidFill>
+                <a:latin typeface="Nunito Sans"/>
+              </a:rPr>
+              <a:t>• </a:t>
+            </a:r>
+            <a:r>
+              <a:rPr sz="2800" b="0">
+                <a:solidFill>
+                  <a:srgbClr val="1F2A44"/>
+                </a:solidFill>
+                <a:latin typeface="Nunito Sans"/>
+              </a:rPr>
+              <a:t>Recuerda la sesión 6: autoridad por poder</a:t>
             </a:r>
           </a:p>
         </p:txBody>
